--- a/sem_4_asm/presentations/caos_4_pipeline.pptx
+++ b/sem_4_asm/presentations/caos_4_pipeline.pptx
@@ -18,42 +18,43 @@
     <p:sldId id="266" r:id="rId12"/>
     <p:sldId id="267" r:id="rId13"/>
     <p:sldId id="271" r:id="rId14"/>
-    <p:sldId id="268" r:id="rId15"/>
-    <p:sldId id="269" r:id="rId16"/>
-    <p:sldId id="272" r:id="rId17"/>
-    <p:sldId id="270" r:id="rId18"/>
-    <p:sldId id="273" r:id="rId19"/>
-    <p:sldId id="277" r:id="rId20"/>
-    <p:sldId id="278" r:id="rId21"/>
-    <p:sldId id="274" r:id="rId22"/>
-    <p:sldId id="279" r:id="rId23"/>
-    <p:sldId id="280" r:id="rId24"/>
-    <p:sldId id="281" r:id="rId25"/>
-    <p:sldId id="304" r:id="rId26"/>
-    <p:sldId id="282" r:id="rId27"/>
-    <p:sldId id="285" r:id="rId28"/>
-    <p:sldId id="286" r:id="rId29"/>
-    <p:sldId id="294" r:id="rId30"/>
-    <p:sldId id="296" r:id="rId31"/>
-    <p:sldId id="297" r:id="rId32"/>
-    <p:sldId id="295" r:id="rId33"/>
-    <p:sldId id="298" r:id="rId34"/>
-    <p:sldId id="299" r:id="rId35"/>
-    <p:sldId id="300" r:id="rId36"/>
-    <p:sldId id="301" r:id="rId37"/>
-    <p:sldId id="302" r:id="rId38"/>
-    <p:sldId id="303" r:id="rId39"/>
-    <p:sldId id="275" r:id="rId40"/>
-    <p:sldId id="276" r:id="rId41"/>
-    <p:sldId id="283" r:id="rId42"/>
-    <p:sldId id="287" r:id="rId43"/>
-    <p:sldId id="292" r:id="rId44"/>
-    <p:sldId id="293" r:id="rId45"/>
-    <p:sldId id="288" r:id="rId46"/>
-    <p:sldId id="289" r:id="rId47"/>
-    <p:sldId id="290" r:id="rId48"/>
-    <p:sldId id="291" r:id="rId49"/>
-    <p:sldId id="284" r:id="rId50"/>
+    <p:sldId id="305" r:id="rId15"/>
+    <p:sldId id="268" r:id="rId16"/>
+    <p:sldId id="269" r:id="rId17"/>
+    <p:sldId id="272" r:id="rId18"/>
+    <p:sldId id="270" r:id="rId19"/>
+    <p:sldId id="273" r:id="rId20"/>
+    <p:sldId id="277" r:id="rId21"/>
+    <p:sldId id="278" r:id="rId22"/>
+    <p:sldId id="274" r:id="rId23"/>
+    <p:sldId id="279" r:id="rId24"/>
+    <p:sldId id="280" r:id="rId25"/>
+    <p:sldId id="281" r:id="rId26"/>
+    <p:sldId id="304" r:id="rId27"/>
+    <p:sldId id="282" r:id="rId28"/>
+    <p:sldId id="285" r:id="rId29"/>
+    <p:sldId id="286" r:id="rId30"/>
+    <p:sldId id="294" r:id="rId31"/>
+    <p:sldId id="296" r:id="rId32"/>
+    <p:sldId id="297" r:id="rId33"/>
+    <p:sldId id="295" r:id="rId34"/>
+    <p:sldId id="298" r:id="rId35"/>
+    <p:sldId id="299" r:id="rId36"/>
+    <p:sldId id="300" r:id="rId37"/>
+    <p:sldId id="301" r:id="rId38"/>
+    <p:sldId id="302" r:id="rId39"/>
+    <p:sldId id="303" r:id="rId40"/>
+    <p:sldId id="275" r:id="rId41"/>
+    <p:sldId id="276" r:id="rId42"/>
+    <p:sldId id="283" r:id="rId43"/>
+    <p:sldId id="287" r:id="rId44"/>
+    <p:sldId id="292" r:id="rId45"/>
+    <p:sldId id="293" r:id="rId46"/>
+    <p:sldId id="288" r:id="rId47"/>
+    <p:sldId id="289" r:id="rId48"/>
+    <p:sldId id="290" r:id="rId49"/>
+    <p:sldId id="291" r:id="rId50"/>
+    <p:sldId id="284" r:id="rId51"/>
   </p:sldIdLst>
   <p:sldSz cx="20104100" cy="11309350"/>
   <p:notesSz cx="20104100" cy="11309350"/>
@@ -310,7 +311,7 @@
           <a:p>
             <a:fld id="{1D8BD707-D9CF-40AE-B4C6-C98DA3205C09}" type="datetimeFigureOut">
               <a:rPr lang="en-US"/>
-              <a:t>10/11/2024</a:t>
+              <a:t>10/4/2025</a:t>
             </a:fld>
             <a:endParaRPr lang="en-US"/>
           </a:p>
@@ -485,7 +486,7 @@
           <a:p>
             <a:fld id="{1D8BD707-D9CF-40AE-B4C6-C98DA3205C09}" type="datetimeFigureOut">
               <a:rPr lang="en-US"/>
-              <a:t>10/11/2024</a:t>
+              <a:t>10/4/2025</a:t>
             </a:fld>
             <a:endParaRPr lang="en-US"/>
           </a:p>
@@ -699,7 +700,7 @@
           <a:p>
             <a:fld id="{1D8BD707-D9CF-40AE-B4C6-C98DA3205C09}" type="datetimeFigureOut">
               <a:rPr lang="en-US"/>
-              <a:t>10/11/2024</a:t>
+              <a:t>10/4/2025</a:t>
             </a:fld>
             <a:endParaRPr lang="en-US"/>
           </a:p>
@@ -847,7 +848,7 @@
           <a:p>
             <a:fld id="{1D8BD707-D9CF-40AE-B4C6-C98DA3205C09}" type="datetimeFigureOut">
               <a:rPr lang="en-US"/>
-              <a:t>10/11/2024</a:t>
+              <a:t>10/4/2025</a:t>
             </a:fld>
             <a:endParaRPr lang="en-US"/>
           </a:p>
@@ -966,7 +967,7 @@
           <a:p>
             <a:fld id="{1D8BD707-D9CF-40AE-B4C6-C98DA3205C09}" type="datetimeFigureOut">
               <a:rPr lang="en-US"/>
-              <a:t>10/11/2024</a:t>
+              <a:t>10/4/2025</a:t>
             </a:fld>
             <a:endParaRPr lang="en-US"/>
           </a:p>
@@ -1189,7 +1190,7 @@
           <a:p>
             <a:fld id="{1D8BD707-D9CF-40AE-B4C6-C98DA3205C09}" type="datetimeFigureOut">
               <a:rPr lang="en-US"/>
-              <a:t>10/11/2024</a:t>
+              <a:t>10/4/2025</a:t>
             </a:fld>
             <a:endParaRPr lang="en-US"/>
           </a:p>
@@ -2202,242 +2203,6 @@
       </p:sp>
       <p:sp>
         <p:nvSpPr>
-          <p:cNvPr id="3" name="object 3"/>
-          <p:cNvSpPr txBox="1"/>
-          <p:nvPr/>
-        </p:nvSpPr>
-        <p:spPr>
-          <a:xfrm>
-            <a:off x="1076272" y="3478164"/>
-            <a:ext cx="4511675" cy="3128421"/>
-          </a:xfrm>
-          <a:prstGeom prst="rect">
-            <a:avLst/>
-          </a:prstGeom>
-        </p:spPr>
-        <p:txBody>
-          <a:bodyPr vert="horz" wrap="square" lIns="0" tIns="50165" rIns="0" bIns="0" rtlCol="0">
-            <a:spAutoFit/>
-          </a:bodyPr>
-          <a:lstStyle/>
-          <a:p>
-            <a:pPr marL="1068070" marR="5080">
-              <a:lnSpc>
-                <a:spcPts val="3960"/>
-              </a:lnSpc>
-              <a:spcBef>
-                <a:spcPts val="395"/>
-              </a:spcBef>
-            </a:pPr>
-            <a:r>
-              <a:rPr sz="3450" dirty="0">
-                <a:latin typeface="Arial" panose="020B0604020202020204" pitchFamily="34" charset="0"/>
-                <a:cs typeface="Arial" panose="020B0604020202020204" pitchFamily="34" charset="0"/>
-              </a:rPr>
-              <a:t>cmp</a:t>
-            </a:r>
-            <a:r>
-              <a:rPr sz="3450" spc="50" dirty="0">
-                <a:latin typeface="Arial" panose="020B0604020202020204" pitchFamily="34" charset="0"/>
-                <a:cs typeface="Arial" panose="020B0604020202020204" pitchFamily="34" charset="0"/>
-              </a:rPr>
-              <a:t> </a:t>
-            </a:r>
-            <a:r>
-              <a:rPr sz="3450" dirty="0">
-                <a:latin typeface="Arial" panose="020B0604020202020204" pitchFamily="34" charset="0"/>
-                <a:cs typeface="Arial" panose="020B0604020202020204" pitchFamily="34" charset="0"/>
-              </a:rPr>
-              <a:t>al,</a:t>
-            </a:r>
-            <a:r>
-              <a:rPr sz="3450" spc="50" dirty="0">
-                <a:latin typeface="Arial" panose="020B0604020202020204" pitchFamily="34" charset="0"/>
-                <a:cs typeface="Arial" panose="020B0604020202020204" pitchFamily="34" charset="0"/>
-              </a:rPr>
-              <a:t> </a:t>
-            </a:r>
-            <a:r>
-              <a:rPr sz="3450" dirty="0">
-                <a:latin typeface="Arial" panose="020B0604020202020204" pitchFamily="34" charset="0"/>
-                <a:cs typeface="Arial" panose="020B0604020202020204" pitchFamily="34" charset="0"/>
-              </a:rPr>
-              <a:t>n2 </a:t>
-            </a:r>
-            <a:r>
-              <a:rPr sz="3450" spc="5" dirty="0">
-                <a:latin typeface="Arial" panose="020B0604020202020204" pitchFamily="34" charset="0"/>
-                <a:cs typeface="Arial" panose="020B0604020202020204" pitchFamily="34" charset="0"/>
-              </a:rPr>
-              <a:t> </a:t>
-            </a:r>
-            <a:r>
-              <a:rPr sz="3450" dirty="0">
-                <a:latin typeface="Arial" panose="020B0604020202020204" pitchFamily="34" charset="0"/>
-                <a:cs typeface="Arial" panose="020B0604020202020204" pitchFamily="34" charset="0"/>
-              </a:rPr>
-              <a:t>jne not_equal </a:t>
-            </a:r>
-            <a:r>
-              <a:rPr sz="3450" spc="-2065" dirty="0">
-                <a:latin typeface="Arial" panose="020B0604020202020204" pitchFamily="34" charset="0"/>
-                <a:cs typeface="Arial" panose="020B0604020202020204" pitchFamily="34" charset="0"/>
-              </a:rPr>
-              <a:t> </a:t>
-            </a:r>
-            <a:r>
-              <a:rPr sz="3450" dirty="0">
-                <a:latin typeface="Arial" panose="020B0604020202020204" pitchFamily="34" charset="0"/>
-                <a:cs typeface="Arial" panose="020B0604020202020204" pitchFamily="34" charset="0"/>
-              </a:rPr>
-              <a:t>mov</a:t>
-            </a:r>
-            <a:r>
-              <a:rPr sz="3450" spc="45" dirty="0">
-                <a:latin typeface="Arial" panose="020B0604020202020204" pitchFamily="34" charset="0"/>
-                <a:cs typeface="Arial" panose="020B0604020202020204" pitchFamily="34" charset="0"/>
-              </a:rPr>
-              <a:t> </a:t>
-            </a:r>
-            <a:r>
-              <a:rPr sz="3450" dirty="0">
-                <a:latin typeface="Arial" panose="020B0604020202020204" pitchFamily="34" charset="0"/>
-                <a:cs typeface="Arial" panose="020B0604020202020204" pitchFamily="34" charset="0"/>
-              </a:rPr>
-              <a:t>eax,</a:t>
-            </a:r>
-            <a:r>
-              <a:rPr sz="3450" spc="50" dirty="0">
-                <a:latin typeface="Arial" panose="020B0604020202020204" pitchFamily="34" charset="0"/>
-                <a:cs typeface="Arial" panose="020B0604020202020204" pitchFamily="34" charset="0"/>
-              </a:rPr>
-              <a:t> </a:t>
-            </a:r>
-            <a:r>
-              <a:rPr sz="3450" spc="5" dirty="0">
-                <a:latin typeface="Arial" panose="020B0604020202020204" pitchFamily="34" charset="0"/>
-                <a:cs typeface="Arial" panose="020B0604020202020204" pitchFamily="34" charset="0"/>
-              </a:rPr>
-              <a:t>0 </a:t>
-            </a:r>
-            <a:r>
-              <a:rPr sz="3450" spc="10" dirty="0">
-                <a:latin typeface="Arial" panose="020B0604020202020204" pitchFamily="34" charset="0"/>
-                <a:cs typeface="Arial" panose="020B0604020202020204" pitchFamily="34" charset="0"/>
-              </a:rPr>
-              <a:t> </a:t>
-            </a:r>
-            <a:r>
-              <a:rPr sz="3450" dirty="0">
-                <a:latin typeface="Arial" panose="020B0604020202020204" pitchFamily="34" charset="0"/>
-                <a:cs typeface="Arial" panose="020B0604020202020204" pitchFamily="34" charset="0"/>
-              </a:rPr>
-              <a:t>jmp</a:t>
-            </a:r>
-            <a:r>
-              <a:rPr sz="3450" spc="-10" dirty="0">
-                <a:latin typeface="Arial" panose="020B0604020202020204" pitchFamily="34" charset="0"/>
-                <a:cs typeface="Arial" panose="020B0604020202020204" pitchFamily="34" charset="0"/>
-              </a:rPr>
-              <a:t> </a:t>
-            </a:r>
-            <a:r>
-              <a:rPr sz="3450" spc="5" dirty="0">
-                <a:latin typeface="Arial" panose="020B0604020202020204" pitchFamily="34" charset="0"/>
-                <a:cs typeface="Arial" panose="020B0604020202020204" pitchFamily="34" charset="0"/>
-              </a:rPr>
-              <a:t>equal</a:t>
-            </a:r>
-            <a:endParaRPr sz="3450" dirty="0">
-              <a:latin typeface="Arial" panose="020B0604020202020204" pitchFamily="34" charset="0"/>
-              <a:cs typeface="Arial" panose="020B0604020202020204" pitchFamily="34" charset="0"/>
-            </a:endParaRPr>
-          </a:p>
-          <a:p>
-            <a:pPr marL="12700">
-              <a:lnSpc>
-                <a:spcPts val="3754"/>
-              </a:lnSpc>
-            </a:pPr>
-            <a:r>
-              <a:rPr sz="3450" spc="5" dirty="0">
-                <a:latin typeface="Arial" panose="020B0604020202020204" pitchFamily="34" charset="0"/>
-                <a:cs typeface="Arial" panose="020B0604020202020204" pitchFamily="34" charset="0"/>
-              </a:rPr>
-              <a:t>not_equal:</a:t>
-            </a:r>
-            <a:endParaRPr sz="3450" dirty="0">
-              <a:latin typeface="Arial" panose="020B0604020202020204" pitchFamily="34" charset="0"/>
-              <a:cs typeface="Arial" panose="020B0604020202020204" pitchFamily="34" charset="0"/>
-            </a:endParaRPr>
-          </a:p>
-          <a:p>
-            <a:pPr marL="12700" marR="796290" indent="1055370">
-              <a:lnSpc>
-                <a:spcPts val="3960"/>
-              </a:lnSpc>
-              <a:spcBef>
-                <a:spcPts val="185"/>
-              </a:spcBef>
-            </a:pPr>
-            <a:r>
-              <a:rPr sz="3450" dirty="0">
-                <a:latin typeface="Arial" panose="020B0604020202020204" pitchFamily="34" charset="0"/>
-                <a:cs typeface="Arial" panose="020B0604020202020204" pitchFamily="34" charset="0"/>
-              </a:rPr>
-              <a:t>mov</a:t>
-            </a:r>
-            <a:r>
-              <a:rPr sz="3450" spc="-30" dirty="0">
-                <a:latin typeface="Arial" panose="020B0604020202020204" pitchFamily="34" charset="0"/>
-                <a:cs typeface="Arial" panose="020B0604020202020204" pitchFamily="34" charset="0"/>
-              </a:rPr>
-              <a:t> </a:t>
-            </a:r>
-            <a:r>
-              <a:rPr sz="3450" dirty="0">
-                <a:latin typeface="Arial" panose="020B0604020202020204" pitchFamily="34" charset="0"/>
-                <a:cs typeface="Arial" panose="020B0604020202020204" pitchFamily="34" charset="0"/>
-              </a:rPr>
-              <a:t>eax,</a:t>
-            </a:r>
-            <a:r>
-              <a:rPr sz="3450" spc="-30" dirty="0">
-                <a:latin typeface="Arial" panose="020B0604020202020204" pitchFamily="34" charset="0"/>
-                <a:cs typeface="Arial" panose="020B0604020202020204" pitchFamily="34" charset="0"/>
-              </a:rPr>
-              <a:t> </a:t>
-            </a:r>
-            <a:r>
-              <a:rPr sz="3450" spc="5" dirty="0">
-                <a:latin typeface="Arial" panose="020B0604020202020204" pitchFamily="34" charset="0"/>
-                <a:cs typeface="Arial" panose="020B0604020202020204" pitchFamily="34" charset="0"/>
-              </a:rPr>
-              <a:t>1 </a:t>
-            </a:r>
-            <a:r>
-              <a:rPr sz="3450" spc="-2055" dirty="0">
-                <a:latin typeface="Arial" panose="020B0604020202020204" pitchFamily="34" charset="0"/>
-                <a:cs typeface="Arial" panose="020B0604020202020204" pitchFamily="34" charset="0"/>
-              </a:rPr>
-              <a:t> </a:t>
-            </a:r>
-            <a:r>
-              <a:rPr sz="3450" spc="5" dirty="0">
-                <a:latin typeface="Arial" panose="020B0604020202020204" pitchFamily="34" charset="0"/>
-                <a:cs typeface="Arial" panose="020B0604020202020204" pitchFamily="34" charset="0"/>
-              </a:rPr>
-              <a:t>equal:</a:t>
-            </a:r>
-            <a:endParaRPr sz="3450" dirty="0">
-              <a:latin typeface="Arial" panose="020B0604020202020204" pitchFamily="34" charset="0"/>
-              <a:cs typeface="Arial" panose="020B0604020202020204" pitchFamily="34" charset="0"/>
-            </a:endParaRPr>
-          </a:p>
-        </p:txBody>
-      </p:sp>
-      <p:sp>
-        <p:nvSpPr>
           <p:cNvPr id="4" name="object 4"/>
           <p:cNvSpPr txBox="1"/>
           <p:nvPr/>
@@ -2445,7 +2210,7 @@
         <p:spPr>
           <a:xfrm>
             <a:off x="6354457" y="3492823"/>
-            <a:ext cx="12347575" cy="1030605"/>
+            <a:ext cx="12347575" cy="1197123"/>
           </a:xfrm>
           <a:prstGeom prst="rect">
             <a:avLst/>
@@ -2470,78 +2235,108 @@
               </a:tabLst>
             </a:pPr>
             <a:r>
-              <a:rPr sz="3050" dirty="0">
+              <a:rPr sz="3600" dirty="0">
                 <a:solidFill>
                   <a:srgbClr val="017100"/>
                 </a:solidFill>
-                <a:latin typeface="Courier New"/>
-                <a:cs typeface="Courier New"/>
-              </a:rPr>
-              <a:t>;	сраниваем значения регистра </a:t>
-            </a:r>
-            <a:r>
-              <a:rPr sz="3050" spc="-5" dirty="0">
+                <a:latin typeface="Calibri" panose="020F0502020204030204" pitchFamily="34" charset="0"/>
+                <a:cs typeface="Calibri" panose="020F0502020204030204" pitchFamily="34" charset="0"/>
+              </a:rPr>
+              <a:t>;	сраниваем значения </a:t>
+            </a:r>
+            <a:r>
+              <a:rPr sz="3600" dirty="0" err="1">
                 <a:solidFill>
                   <a:srgbClr val="017100"/>
                 </a:solidFill>
-                <a:latin typeface="Courier New"/>
-                <a:cs typeface="Courier New"/>
-              </a:rPr>
-              <a:t>AL	</a:t>
-            </a:r>
-            <a:r>
-              <a:rPr sz="3050" dirty="0">
+                <a:latin typeface="Calibri" panose="020F0502020204030204" pitchFamily="34" charset="0"/>
+                <a:cs typeface="Calibri" panose="020F0502020204030204" pitchFamily="34" charset="0"/>
+              </a:rPr>
+              <a:t>регистра</a:t>
+            </a:r>
+            <a:r>
+              <a:rPr sz="3600" dirty="0">
                 <a:solidFill>
                   <a:srgbClr val="017100"/>
                 </a:solidFill>
-                <a:latin typeface="Courier New"/>
-                <a:cs typeface="Courier New"/>
-              </a:rPr>
-              <a:t>и</a:t>
-            </a:r>
-            <a:r>
-              <a:rPr sz="3050" spc="-40" dirty="0">
+                <a:latin typeface="Calibri" panose="020F0502020204030204" pitchFamily="34" charset="0"/>
+                <a:cs typeface="Calibri" panose="020F0502020204030204" pitchFamily="34" charset="0"/>
+              </a:rPr>
+              <a:t> </a:t>
+            </a:r>
+            <a:r>
+              <a:rPr sz="3600" spc="-5" dirty="0">
                 <a:solidFill>
                   <a:srgbClr val="017100"/>
                 </a:solidFill>
-                <a:latin typeface="Courier New"/>
-                <a:cs typeface="Courier New"/>
-              </a:rPr>
-              <a:t> </a:t>
-            </a:r>
-            <a:r>
-              <a:rPr sz="3050" dirty="0">
+                <a:latin typeface="Calibri" panose="020F0502020204030204" pitchFamily="34" charset="0"/>
+                <a:cs typeface="Calibri" panose="020F0502020204030204" pitchFamily="34" charset="0"/>
+              </a:rPr>
+              <a:t>AL</a:t>
+            </a:r>
+            <a:r>
+              <a:rPr lang="en-US" sz="3600" spc="-5" dirty="0">
                 <a:solidFill>
                   <a:srgbClr val="017100"/>
                 </a:solidFill>
-                <a:latin typeface="Courier New"/>
-                <a:cs typeface="Courier New"/>
-              </a:rPr>
-              <a:t>переменной</a:t>
-            </a:r>
-            <a:r>
-              <a:rPr sz="3050" spc="-35" dirty="0">
+                <a:latin typeface="Calibri" panose="020F0502020204030204" pitchFamily="34" charset="0"/>
+                <a:cs typeface="Calibri" panose="020F0502020204030204" pitchFamily="34" charset="0"/>
+              </a:rPr>
+              <a:t> </a:t>
+            </a:r>
+            <a:r>
+              <a:rPr sz="3600" dirty="0">
                 <a:solidFill>
                   <a:srgbClr val="017100"/>
                 </a:solidFill>
-                <a:latin typeface="Courier New"/>
-                <a:cs typeface="Courier New"/>
-              </a:rPr>
-              <a:t> </a:t>
-            </a:r>
-            <a:r>
-              <a:rPr sz="3050" dirty="0">
+                <a:latin typeface="Calibri" panose="020F0502020204030204" pitchFamily="34" charset="0"/>
+                <a:cs typeface="Calibri" panose="020F0502020204030204" pitchFamily="34" charset="0"/>
+              </a:rPr>
+              <a:t>и</a:t>
+            </a:r>
+            <a:r>
+              <a:rPr sz="3600" spc="-40" dirty="0">
                 <a:solidFill>
                   <a:srgbClr val="017100"/>
                 </a:solidFill>
-                <a:latin typeface="Courier New"/>
-                <a:cs typeface="Courier New"/>
+                <a:latin typeface="Calibri" panose="020F0502020204030204" pitchFamily="34" charset="0"/>
+                <a:cs typeface="Calibri" panose="020F0502020204030204" pitchFamily="34" charset="0"/>
+              </a:rPr>
+              <a:t> </a:t>
+            </a:r>
+            <a:r>
+              <a:rPr sz="3600" dirty="0">
+                <a:solidFill>
+                  <a:srgbClr val="017100"/>
+                </a:solidFill>
+                <a:latin typeface="Calibri" panose="020F0502020204030204" pitchFamily="34" charset="0"/>
+                <a:cs typeface="Calibri" panose="020F0502020204030204" pitchFamily="34" charset="0"/>
+              </a:rPr>
+              <a:t>переменной</a:t>
+            </a:r>
+            <a:r>
+              <a:rPr sz="3600" spc="-35" dirty="0">
+                <a:solidFill>
+                  <a:srgbClr val="017100"/>
+                </a:solidFill>
+                <a:latin typeface="Calibri" panose="020F0502020204030204" pitchFamily="34" charset="0"/>
+                <a:cs typeface="Calibri" panose="020F0502020204030204" pitchFamily="34" charset="0"/>
+              </a:rPr>
+              <a:t> </a:t>
+            </a:r>
+            <a:r>
+              <a:rPr sz="3600" dirty="0">
+                <a:solidFill>
+                  <a:srgbClr val="017100"/>
+                </a:solidFill>
+                <a:latin typeface="Calibri" panose="020F0502020204030204" pitchFamily="34" charset="0"/>
+                <a:cs typeface="Calibri" panose="020F0502020204030204" pitchFamily="34" charset="0"/>
               </a:rPr>
               <a:t>n2</a:t>
             </a:r>
-            <a:endParaRPr sz="3050">
-              <a:latin typeface="Courier New"/>
-              <a:cs typeface="Courier New"/>
+            <a:endParaRPr sz="3600" dirty="0">
+              <a:latin typeface="Calibri" panose="020F0502020204030204" pitchFamily="34" charset="0"/>
+              <a:cs typeface="Calibri" panose="020F0502020204030204" pitchFamily="34" charset="0"/>
             </a:endParaRPr>
           </a:p>
           <a:p>
@@ -2558,78 +2353,118 @@
               </a:tabLst>
             </a:pPr>
             <a:r>
-              <a:rPr sz="3050" dirty="0">
+              <a:rPr sz="3600" dirty="0">
                 <a:solidFill>
                   <a:srgbClr val="017100"/>
                 </a:solidFill>
-                <a:latin typeface="Courier New"/>
-                <a:cs typeface="Courier New"/>
-              </a:rPr>
-              <a:t>;	если значения не равны,	переходим</a:t>
-            </a:r>
-            <a:r>
-              <a:rPr sz="3050" spc="-35" dirty="0">
+                <a:latin typeface="Calibri" panose="020F0502020204030204" pitchFamily="34" charset="0"/>
+                <a:cs typeface="Calibri" panose="020F0502020204030204" pitchFamily="34" charset="0"/>
+              </a:rPr>
+              <a:t>;	если значения не </a:t>
+            </a:r>
+            <a:r>
+              <a:rPr sz="3600" dirty="0" err="1">
                 <a:solidFill>
                   <a:srgbClr val="017100"/>
                 </a:solidFill>
-                <a:latin typeface="Courier New"/>
-                <a:cs typeface="Courier New"/>
-              </a:rPr>
-              <a:t> </a:t>
-            </a:r>
-            <a:r>
-              <a:rPr sz="3050" dirty="0">
+                <a:latin typeface="Calibri" panose="020F0502020204030204" pitchFamily="34" charset="0"/>
+                <a:cs typeface="Calibri" panose="020F0502020204030204" pitchFamily="34" charset="0"/>
+              </a:rPr>
+              <a:t>равны</a:t>
+            </a:r>
+            <a:r>
+              <a:rPr sz="3600" dirty="0">
                 <a:solidFill>
                   <a:srgbClr val="017100"/>
                 </a:solidFill>
-                <a:latin typeface="Courier New"/>
-                <a:cs typeface="Courier New"/>
-              </a:rPr>
-              <a:t>к</a:t>
-            </a:r>
-            <a:r>
-              <a:rPr sz="3050" spc="-35" dirty="0">
+                <a:latin typeface="Calibri" panose="020F0502020204030204" pitchFamily="34" charset="0"/>
+                <a:cs typeface="Calibri" panose="020F0502020204030204" pitchFamily="34" charset="0"/>
+              </a:rPr>
+              <a:t>,</a:t>
+            </a:r>
+            <a:r>
+              <a:rPr lang="en-US" sz="3600" dirty="0">
                 <a:solidFill>
                   <a:srgbClr val="017100"/>
                 </a:solidFill>
-                <a:latin typeface="Courier New"/>
-                <a:cs typeface="Courier New"/>
-              </a:rPr>
-              <a:t> </a:t>
-            </a:r>
-            <a:r>
-              <a:rPr sz="3050" dirty="0">
+                <a:latin typeface="Calibri" panose="020F0502020204030204" pitchFamily="34" charset="0"/>
+                <a:cs typeface="Calibri" panose="020F0502020204030204" pitchFamily="34" charset="0"/>
+              </a:rPr>
+              <a:t> </a:t>
+            </a:r>
+            <a:r>
+              <a:rPr sz="3600" dirty="0" err="1">
                 <a:solidFill>
                   <a:srgbClr val="017100"/>
                 </a:solidFill>
-                <a:latin typeface="Courier New"/>
-                <a:cs typeface="Courier New"/>
-              </a:rPr>
-              <a:t>метке</a:t>
-            </a:r>
-            <a:r>
-              <a:rPr sz="3050" spc="-30" dirty="0">
+                <a:latin typeface="Calibri" panose="020F0502020204030204" pitchFamily="34" charset="0"/>
+                <a:cs typeface="Calibri" panose="020F0502020204030204" pitchFamily="34" charset="0"/>
+              </a:rPr>
+              <a:t>переходим</a:t>
+            </a:r>
+            <a:r>
+              <a:rPr sz="3600" spc="-35" dirty="0">
                 <a:solidFill>
                   <a:srgbClr val="017100"/>
                 </a:solidFill>
-                <a:latin typeface="Courier New"/>
-                <a:cs typeface="Courier New"/>
-              </a:rPr>
-              <a:t> </a:t>
-            </a:r>
-            <a:r>
-              <a:rPr sz="3050" dirty="0">
+                <a:latin typeface="Calibri" panose="020F0502020204030204" pitchFamily="34" charset="0"/>
+                <a:cs typeface="Calibri" panose="020F0502020204030204" pitchFamily="34" charset="0"/>
+              </a:rPr>
+              <a:t> </a:t>
+            </a:r>
+            <a:r>
+              <a:rPr sz="3600" dirty="0">
                 <a:solidFill>
                   <a:srgbClr val="017100"/>
                 </a:solidFill>
-                <a:latin typeface="Courier New"/>
-                <a:cs typeface="Courier New"/>
+                <a:latin typeface="Calibri" panose="020F0502020204030204" pitchFamily="34" charset="0"/>
+                <a:cs typeface="Calibri" panose="020F0502020204030204" pitchFamily="34" charset="0"/>
+              </a:rPr>
+              <a:t>к</a:t>
+            </a:r>
+            <a:r>
+              <a:rPr sz="3600" spc="-35" dirty="0">
+                <a:solidFill>
+                  <a:srgbClr val="017100"/>
+                </a:solidFill>
+                <a:latin typeface="Calibri" panose="020F0502020204030204" pitchFamily="34" charset="0"/>
+                <a:cs typeface="Calibri" panose="020F0502020204030204" pitchFamily="34" charset="0"/>
+              </a:rPr>
+              <a:t> </a:t>
+            </a:r>
+            <a:r>
+              <a:rPr sz="3600" dirty="0">
+                <a:solidFill>
+                  <a:srgbClr val="017100"/>
+                </a:solidFill>
+                <a:latin typeface="Calibri" panose="020F0502020204030204" pitchFamily="34" charset="0"/>
+                <a:cs typeface="Calibri" panose="020F0502020204030204" pitchFamily="34" charset="0"/>
+              </a:rPr>
+              <a:t>метке</a:t>
+            </a:r>
+            <a:r>
+              <a:rPr sz="3600" spc="-30" dirty="0">
+                <a:solidFill>
+                  <a:srgbClr val="017100"/>
+                </a:solidFill>
+                <a:latin typeface="Calibri" panose="020F0502020204030204" pitchFamily="34" charset="0"/>
+                <a:cs typeface="Calibri" panose="020F0502020204030204" pitchFamily="34" charset="0"/>
+              </a:rPr>
+              <a:t> </a:t>
+            </a:r>
+            <a:r>
+              <a:rPr sz="3600" dirty="0">
+                <a:solidFill>
+                  <a:srgbClr val="017100"/>
+                </a:solidFill>
+                <a:latin typeface="Calibri" panose="020F0502020204030204" pitchFamily="34" charset="0"/>
+                <a:cs typeface="Calibri" panose="020F0502020204030204" pitchFamily="34" charset="0"/>
               </a:rPr>
               <a:t>not_equal</a:t>
             </a:r>
-            <a:endParaRPr sz="3050">
-              <a:latin typeface="Courier New"/>
-              <a:cs typeface="Courier New"/>
+            <a:endParaRPr sz="3600" dirty="0">
+              <a:latin typeface="Calibri" panose="020F0502020204030204" pitchFamily="34" charset="0"/>
+              <a:cs typeface="Calibri" panose="020F0502020204030204" pitchFamily="34" charset="0"/>
             </a:endParaRPr>
           </a:p>
         </p:txBody>
@@ -2685,6 +2520,126 @@
               <a:latin typeface="Arial" panose="020B0604020202020204" pitchFamily="34" charset="0"/>
               <a:cs typeface="Arial" panose="020B0604020202020204" pitchFamily="34" charset="0"/>
             </a:endParaRPr>
+          </a:p>
+        </p:txBody>
+      </p:sp>
+      <p:sp>
+        <p:nvSpPr>
+          <p:cNvPr id="8" name="TextBox 7">
+            <a:extLst>
+              <a:ext uri="{FF2B5EF4-FFF2-40B4-BE49-F238E27FC236}">
+                <a16:creationId xmlns:a16="http://schemas.microsoft.com/office/drawing/2014/main" id="{4C21CC57-B296-4576-8BD2-A61069F66140}"/>
+              </a:ext>
+            </a:extLst>
+          </p:cNvPr>
+          <p:cNvSpPr txBox="1"/>
+          <p:nvPr/>
+        </p:nvSpPr>
+        <p:spPr>
+          <a:xfrm>
+            <a:off x="2355851" y="3492823"/>
+            <a:ext cx="3810000" cy="3970318"/>
+          </a:xfrm>
+          <a:prstGeom prst="rect">
+            <a:avLst/>
+          </a:prstGeom>
+          <a:noFill/>
+        </p:spPr>
+        <p:txBody>
+          <a:bodyPr wrap="square" rtlCol="0">
+            <a:spAutoFit/>
+          </a:bodyPr>
+          <a:lstStyle/>
+          <a:p>
+            <a:r>
+              <a:rPr lang="en-US" sz="3600" dirty="0"/>
+              <a:t>	</a:t>
+            </a:r>
+            <a:r>
+              <a:rPr lang="en-US" sz="3600" dirty="0" err="1"/>
+              <a:t>cmp</a:t>
+            </a:r>
+            <a:r>
+              <a:rPr lang="en-US" sz="3600" dirty="0"/>
+              <a:t> al, n2 </a:t>
+            </a:r>
+          </a:p>
+          <a:p>
+            <a:r>
+              <a:rPr lang="en-US" sz="3600" dirty="0"/>
+              <a:t>	</a:t>
+            </a:r>
+            <a:r>
+              <a:rPr lang="en-US" sz="3600" dirty="0" err="1"/>
+              <a:t>jne</a:t>
+            </a:r>
+            <a:r>
+              <a:rPr lang="en-US" sz="3600" dirty="0"/>
+              <a:t> </a:t>
+            </a:r>
+            <a:r>
+              <a:rPr lang="en-US" sz="3600" dirty="0" err="1"/>
+              <a:t>not_equal</a:t>
+            </a:r>
+            <a:endParaRPr lang="en-US" sz="3600" dirty="0"/>
+          </a:p>
+          <a:p>
+            <a:r>
+              <a:rPr lang="en-US" sz="3600" dirty="0"/>
+              <a:t>	mov </a:t>
+            </a:r>
+            <a:r>
+              <a:rPr lang="en-US" sz="3600" dirty="0" err="1"/>
+              <a:t>eax</a:t>
+            </a:r>
+            <a:r>
+              <a:rPr lang="en-US" sz="3600" dirty="0"/>
+              <a:t>, 0</a:t>
+            </a:r>
+          </a:p>
+          <a:p>
+            <a:r>
+              <a:rPr lang="en-US" sz="3600" dirty="0"/>
+              <a:t>	</a:t>
+            </a:r>
+            <a:r>
+              <a:rPr lang="en-US" sz="3600" dirty="0" err="1"/>
+              <a:t>jmp</a:t>
+            </a:r>
+            <a:r>
+              <a:rPr lang="en-US" sz="3600" dirty="0"/>
+              <a:t> equal</a:t>
+            </a:r>
+          </a:p>
+          <a:p>
+            <a:r>
+              <a:rPr lang="en-US" sz="3600" dirty="0" err="1"/>
+              <a:t>not_equal</a:t>
+            </a:r>
+            <a:r>
+              <a:rPr lang="en-US" sz="3600" dirty="0"/>
+              <a:t>:</a:t>
+            </a:r>
+          </a:p>
+          <a:p>
+            <a:r>
+              <a:rPr lang="en-US" sz="3600" dirty="0"/>
+              <a:t>	mov </a:t>
+            </a:r>
+            <a:r>
+              <a:rPr lang="en-US" sz="3600" dirty="0" err="1"/>
+              <a:t>eax</a:t>
+            </a:r>
+            <a:r>
+              <a:rPr lang="en-US" sz="3600" dirty="0"/>
+              <a:t>, 1</a:t>
+            </a:r>
+          </a:p>
+          <a:p>
+            <a:r>
+              <a:rPr lang="en-US" sz="3600" dirty="0"/>
+              <a:t>equal:</a:t>
+            </a:r>
           </a:p>
         </p:txBody>
       </p:sp>
@@ -4393,6 +4348,1271 @@
 </file>
 
 <file path=ppt/slides/slide14.xml><?xml version="1.0" encoding="utf-8"?>
+<p:sld xmlns:a="http://schemas.openxmlformats.org/drawingml/2006/main" xmlns:r="http://schemas.openxmlformats.org/officeDocument/2006/relationships" xmlns:p="http://schemas.openxmlformats.org/presentationml/2006/main">
+  <p:cSld>
+    <p:spTree>
+      <p:nvGrpSpPr>
+        <p:cNvPr id="1" name=""/>
+        <p:cNvGrpSpPr/>
+        <p:nvPr/>
+      </p:nvGrpSpPr>
+      <p:grpSpPr>
+        <a:xfrm>
+          <a:off x="0" y="0"/>
+          <a:ext cx="0" cy="0"/>
+          <a:chOff x="0" y="0"/>
+          <a:chExt cx="0" cy="0"/>
+        </a:xfrm>
+      </p:grpSpPr>
+      <p:sp>
+        <p:nvSpPr>
+          <p:cNvPr id="2" name="Title 1">
+            <a:extLst>
+              <a:ext uri="{FF2B5EF4-FFF2-40B4-BE49-F238E27FC236}">
+                <a16:creationId xmlns:a16="http://schemas.microsoft.com/office/drawing/2014/main" id="{021DD9C1-4101-41C9-9C8C-402F6F253FF3}"/>
+              </a:ext>
+            </a:extLst>
+          </p:cNvPr>
+          <p:cNvSpPr>
+            <a:spLocks noGrp="1"/>
+          </p:cNvSpPr>
+          <p:nvPr>
+            <p:ph type="title"/>
+          </p:nvPr>
+        </p:nvSpPr>
+        <p:spPr/>
+        <p:txBody>
+          <a:bodyPr/>
+          <a:lstStyle/>
+          <a:p>
+            <a:r>
+              <a:rPr lang="en-US" dirty="0"/>
+              <a:t>Stack frame</a:t>
+            </a:r>
+            <a:endParaRPr lang="ru-RU" dirty="0"/>
+          </a:p>
+        </p:txBody>
+      </p:sp>
+      <p:pic>
+        <p:nvPicPr>
+          <p:cNvPr id="1028" name="Picture 4" descr="Picture background">
+            <a:extLst>
+              <a:ext uri="{FF2B5EF4-FFF2-40B4-BE49-F238E27FC236}">
+                <a16:creationId xmlns:a16="http://schemas.microsoft.com/office/drawing/2014/main" id="{3C7F3E73-4537-464C-AA0E-3FEB46ACD432}"/>
+              </a:ext>
+            </a:extLst>
+          </p:cNvPr>
+          <p:cNvPicPr>
+            <a:picLocks noChangeAspect="1" noChangeArrowheads="1"/>
+          </p:cNvPicPr>
+          <p:nvPr/>
+        </p:nvPicPr>
+        <p:blipFill>
+          <a:blip r:embed="rId2">
+            <a:extLst>
+              <a:ext uri="{28A0092B-C50C-407E-A947-70E740481C1C}">
+                <a14:useLocalDpi xmlns:a14="http://schemas.microsoft.com/office/drawing/2010/main" val="0"/>
+              </a:ext>
+            </a:extLst>
+          </a:blip>
+          <a:srcRect/>
+          <a:stretch>
+            <a:fillRect/>
+          </a:stretch>
+        </p:blipFill>
+        <p:spPr bwMode="auto">
+          <a:xfrm>
+            <a:off x="104914" y="3599897"/>
+            <a:ext cx="8295072" cy="4930090"/>
+          </a:xfrm>
+          <a:prstGeom prst="rect">
+            <a:avLst/>
+          </a:prstGeom>
+          <a:noFill/>
+          <a:extLst>
+            <a:ext uri="{909E8E84-426E-40DD-AFC4-6F175D3DCCD1}">
+              <a14:hiddenFill xmlns:a14="http://schemas.microsoft.com/office/drawing/2010/main">
+                <a:solidFill>
+                  <a:srgbClr val="FFFFFF"/>
+                </a:solidFill>
+              </a14:hiddenFill>
+            </a:ext>
+          </a:extLst>
+        </p:spPr>
+      </p:pic>
+      <p:pic>
+        <p:nvPicPr>
+          <p:cNvPr id="5" name="Picture 4">
+            <a:extLst>
+              <a:ext uri="{FF2B5EF4-FFF2-40B4-BE49-F238E27FC236}">
+                <a16:creationId xmlns:a16="http://schemas.microsoft.com/office/drawing/2014/main" id="{8C5E8CF7-F20D-4ED4-97C7-4A6E9CECD580}"/>
+              </a:ext>
+            </a:extLst>
+          </p:cNvPr>
+          <p:cNvPicPr>
+            <a:picLocks noChangeAspect="1"/>
+          </p:cNvPicPr>
+          <p:nvPr/>
+        </p:nvPicPr>
+        <p:blipFill>
+          <a:blip r:embed="rId3"/>
+          <a:stretch>
+            <a:fillRect/>
+          </a:stretch>
+        </p:blipFill>
+        <p:spPr>
+          <a:xfrm>
+            <a:off x="10052049" y="2263775"/>
+            <a:ext cx="6334994" cy="2362200"/>
+          </a:xfrm>
+          <a:prstGeom prst="rect">
+            <a:avLst/>
+          </a:prstGeom>
+          <a:ln w="12700">
+            <a:solidFill>
+              <a:schemeClr val="tx1"/>
+            </a:solidFill>
+          </a:ln>
+        </p:spPr>
+      </p:pic>
+      <p:pic>
+        <p:nvPicPr>
+          <p:cNvPr id="7" name="Picture 6">
+            <a:extLst>
+              <a:ext uri="{FF2B5EF4-FFF2-40B4-BE49-F238E27FC236}">
+                <a16:creationId xmlns:a16="http://schemas.microsoft.com/office/drawing/2014/main" id="{43B8D0AB-849A-4FAD-8B16-2068C961390A}"/>
+              </a:ext>
+            </a:extLst>
+          </p:cNvPr>
+          <p:cNvPicPr>
+            <a:picLocks noChangeAspect="1"/>
+          </p:cNvPicPr>
+          <p:nvPr/>
+        </p:nvPicPr>
+        <p:blipFill>
+          <a:blip r:embed="rId4"/>
+          <a:stretch>
+            <a:fillRect/>
+          </a:stretch>
+        </p:blipFill>
+        <p:spPr>
+          <a:xfrm>
+            <a:off x="9941250" y="6170371"/>
+            <a:ext cx="7163196" cy="2206672"/>
+          </a:xfrm>
+          <a:prstGeom prst="rect">
+            <a:avLst/>
+          </a:prstGeom>
+          <a:ln w="12700">
+            <a:solidFill>
+              <a:schemeClr val="tx1"/>
+            </a:solidFill>
+          </a:ln>
+        </p:spPr>
+      </p:pic>
+      <p:pic>
+        <p:nvPicPr>
+          <p:cNvPr id="11" name="Picture 10">
+            <a:extLst>
+              <a:ext uri="{FF2B5EF4-FFF2-40B4-BE49-F238E27FC236}">
+                <a16:creationId xmlns:a16="http://schemas.microsoft.com/office/drawing/2014/main" id="{3B5517EF-0B58-4A47-8D41-642390D418F2}"/>
+              </a:ext>
+            </a:extLst>
+          </p:cNvPr>
+          <p:cNvPicPr>
+            <a:picLocks noChangeAspect="1"/>
+          </p:cNvPicPr>
+          <p:nvPr/>
+        </p:nvPicPr>
+        <p:blipFill>
+          <a:blip r:embed="rId5"/>
+          <a:stretch>
+            <a:fillRect/>
+          </a:stretch>
+        </p:blipFill>
+        <p:spPr>
+          <a:xfrm>
+            <a:off x="9941250" y="9370827"/>
+            <a:ext cx="7281432" cy="1295254"/>
+          </a:xfrm>
+          <a:prstGeom prst="rect">
+            <a:avLst/>
+          </a:prstGeom>
+          <a:ln>
+            <a:solidFill>
+              <a:schemeClr val="tx1"/>
+            </a:solidFill>
+          </a:ln>
+        </p:spPr>
+      </p:pic>
+      <p:sp>
+        <p:nvSpPr>
+          <p:cNvPr id="12" name="TextBox 11">
+            <a:extLst>
+              <a:ext uri="{FF2B5EF4-FFF2-40B4-BE49-F238E27FC236}">
+                <a16:creationId xmlns:a16="http://schemas.microsoft.com/office/drawing/2014/main" id="{424B624F-35AF-4487-A348-C3B5401673DC}"/>
+              </a:ext>
+            </a:extLst>
+          </p:cNvPr>
+          <p:cNvSpPr txBox="1"/>
+          <p:nvPr/>
+        </p:nvSpPr>
+        <p:spPr>
+          <a:xfrm>
+            <a:off x="11694048" y="8337689"/>
+            <a:ext cx="3657600" cy="707886"/>
+          </a:xfrm>
+          <a:prstGeom prst="rect">
+            <a:avLst/>
+          </a:prstGeom>
+          <a:noFill/>
+        </p:spPr>
+        <p:txBody>
+          <a:bodyPr wrap="square" rtlCol="0">
+            <a:spAutoFit/>
+          </a:bodyPr>
+          <a:lstStyle/>
+          <a:p>
+            <a:r>
+              <a:rPr lang="ru-RU" sz="4000" dirty="0"/>
+              <a:t>*код функции*</a:t>
+            </a:r>
+          </a:p>
+        </p:txBody>
+      </p:sp>
+      <p:sp>
+        <p:nvSpPr>
+          <p:cNvPr id="23" name="Freeform: Shape 22">
+            <a:extLst>
+              <a:ext uri="{FF2B5EF4-FFF2-40B4-BE49-F238E27FC236}">
+                <a16:creationId xmlns:a16="http://schemas.microsoft.com/office/drawing/2014/main" id="{D7E0EBA7-E377-497C-96D3-B6F2682478C9}"/>
+              </a:ext>
+            </a:extLst>
+          </p:cNvPr>
+          <p:cNvSpPr/>
+          <p:nvPr/>
+        </p:nvSpPr>
+        <p:spPr>
+          <a:xfrm>
+            <a:off x="9463272" y="3890075"/>
+            <a:ext cx="858599" cy="2510725"/>
+          </a:xfrm>
+          <a:custGeom>
+            <a:avLst/>
+            <a:gdLst>
+              <a:gd name="connsiteX0" fmla="*/ 858599 w 858599"/>
+              <a:gd name="connsiteY0" fmla="*/ 0 h 2510725"/>
+              <a:gd name="connsiteX1" fmla="*/ 6192 w 858599"/>
+              <a:gd name="connsiteY1" fmla="*/ 1162372 h 2510725"/>
+              <a:gd name="connsiteX2" fmla="*/ 486640 w 858599"/>
+              <a:gd name="connsiteY2" fmla="*/ 2510725 h 2510725"/>
+            </a:gdLst>
+            <a:ahLst/>
+            <a:cxnLst>
+              <a:cxn ang="0">
+                <a:pos x="connsiteX0" y="connsiteY0"/>
+              </a:cxn>
+              <a:cxn ang="0">
+                <a:pos x="connsiteX1" y="connsiteY1"/>
+              </a:cxn>
+              <a:cxn ang="0">
+                <a:pos x="connsiteX2" y="connsiteY2"/>
+              </a:cxn>
+            </a:cxnLst>
+            <a:rect l="l" t="t" r="r" b="b"/>
+            <a:pathLst>
+              <a:path w="858599" h="2510725">
+                <a:moveTo>
+                  <a:pt x="858599" y="0"/>
+                </a:moveTo>
+                <a:cubicBezTo>
+                  <a:pt x="463392" y="371959"/>
+                  <a:pt x="68185" y="743918"/>
+                  <a:pt x="6192" y="1162372"/>
+                </a:cubicBezTo>
+                <a:cubicBezTo>
+                  <a:pt x="-55801" y="1580826"/>
+                  <a:pt x="365237" y="2319579"/>
+                  <a:pt x="486640" y="2510725"/>
+                </a:cubicBezTo>
+              </a:path>
+            </a:pathLst>
+          </a:custGeom>
+          <a:noFill/>
+          <a:ln w="28575"/>
+        </p:spPr>
+        <p:style>
+          <a:lnRef idx="1">
+            <a:schemeClr val="dk1"/>
+          </a:lnRef>
+          <a:fillRef idx="0">
+            <a:schemeClr val="dk1"/>
+          </a:fillRef>
+          <a:effectRef idx="0">
+            <a:schemeClr val="dk1"/>
+          </a:effectRef>
+          <a:fontRef idx="minor">
+            <a:schemeClr val="tx1"/>
+          </a:fontRef>
+        </p:style>
+        <p:txBody>
+          <a:bodyPr rtlCol="0" anchor="ctr"/>
+          <a:lstStyle/>
+          <a:p>
+            <a:pPr algn="ctr"/>
+            <a:endParaRPr lang="ru-RU"/>
+          </a:p>
+        </p:txBody>
+      </p:sp>
+      <p:sp>
+        <p:nvSpPr>
+          <p:cNvPr id="25" name="TextBox 24">
+            <a:extLst>
+              <a:ext uri="{FF2B5EF4-FFF2-40B4-BE49-F238E27FC236}">
+                <a16:creationId xmlns:a16="http://schemas.microsoft.com/office/drawing/2014/main" id="{2ADBC527-F17C-456F-9156-01B1394644F1}"/>
+              </a:ext>
+            </a:extLst>
+          </p:cNvPr>
+          <p:cNvSpPr txBox="1"/>
+          <p:nvPr/>
+        </p:nvSpPr>
+        <p:spPr>
+          <a:xfrm>
+            <a:off x="16418147" y="2724844"/>
+            <a:ext cx="2854103" cy="2246769"/>
+          </a:xfrm>
+          <a:prstGeom prst="rect">
+            <a:avLst/>
+          </a:prstGeom>
+          <a:noFill/>
+        </p:spPr>
+        <p:txBody>
+          <a:bodyPr wrap="square" rtlCol="0">
+            <a:spAutoFit/>
+          </a:bodyPr>
+          <a:lstStyle/>
+          <a:p>
+            <a:pPr algn="ctr"/>
+            <a:r>
+              <a:rPr lang="ru-RU" sz="2800" dirty="0"/>
+              <a:t>Второй аргумент</a:t>
+            </a:r>
+          </a:p>
+          <a:p>
+            <a:pPr algn="ctr"/>
+            <a:r>
+              <a:rPr lang="ru-RU" sz="2800" dirty="0"/>
+              <a:t>Первый аргумент</a:t>
+            </a:r>
+          </a:p>
+          <a:p>
+            <a:pPr algn="ctr"/>
+            <a:r>
+              <a:rPr lang="ru-RU" sz="2800" dirty="0"/>
+              <a:t>Вызов функции</a:t>
+            </a:r>
+          </a:p>
+          <a:p>
+            <a:pPr algn="ctr"/>
+            <a:r>
+              <a:rPr lang="ru-RU" sz="2800" dirty="0"/>
+              <a:t>Возвращаемое значение</a:t>
+            </a:r>
+          </a:p>
+        </p:txBody>
+      </p:sp>
+      <p:sp>
+        <p:nvSpPr>
+          <p:cNvPr id="26" name="Rectangle 25">
+            <a:extLst>
+              <a:ext uri="{FF2B5EF4-FFF2-40B4-BE49-F238E27FC236}">
+                <a16:creationId xmlns:a16="http://schemas.microsoft.com/office/drawing/2014/main" id="{9C27CD67-65E6-4BA3-A1BD-EC7645BB2A6C}"/>
+              </a:ext>
+            </a:extLst>
+          </p:cNvPr>
+          <p:cNvSpPr/>
+          <p:nvPr/>
+        </p:nvSpPr>
+        <p:spPr>
+          <a:xfrm>
+            <a:off x="10052049" y="2724845"/>
+            <a:ext cx="9220201" cy="514302"/>
+          </a:xfrm>
+          <a:prstGeom prst="rect">
+            <a:avLst/>
+          </a:prstGeom>
+          <a:noFill/>
+          <a:ln>
+            <a:solidFill>
+              <a:schemeClr val="tx1"/>
+            </a:solidFill>
+          </a:ln>
+        </p:spPr>
+        <p:style>
+          <a:lnRef idx="2">
+            <a:schemeClr val="accent1">
+              <a:shade val="50000"/>
+            </a:schemeClr>
+          </a:lnRef>
+          <a:fillRef idx="1">
+            <a:schemeClr val="accent1"/>
+          </a:fillRef>
+          <a:effectRef idx="0">
+            <a:schemeClr val="accent1"/>
+          </a:effectRef>
+          <a:fontRef idx="minor">
+            <a:schemeClr val="lt1"/>
+          </a:fontRef>
+        </p:style>
+        <p:txBody>
+          <a:bodyPr rtlCol="0" anchor="ctr"/>
+          <a:lstStyle/>
+          <a:p>
+            <a:pPr algn="ctr"/>
+            <a:endParaRPr lang="ru-RU"/>
+          </a:p>
+        </p:txBody>
+      </p:sp>
+      <p:sp>
+        <p:nvSpPr>
+          <p:cNvPr id="30" name="Rectangle 29">
+            <a:extLst>
+              <a:ext uri="{FF2B5EF4-FFF2-40B4-BE49-F238E27FC236}">
+                <a16:creationId xmlns:a16="http://schemas.microsoft.com/office/drawing/2014/main" id="{1081A542-45F6-42ED-BBB5-0FC4B7E4E429}"/>
+              </a:ext>
+            </a:extLst>
+          </p:cNvPr>
+          <p:cNvSpPr/>
+          <p:nvPr/>
+        </p:nvSpPr>
+        <p:spPr>
+          <a:xfrm>
+            <a:off x="10061089" y="3239147"/>
+            <a:ext cx="9220201" cy="360750"/>
+          </a:xfrm>
+          <a:prstGeom prst="rect">
+            <a:avLst/>
+          </a:prstGeom>
+          <a:noFill/>
+          <a:ln>
+            <a:solidFill>
+              <a:schemeClr val="tx1"/>
+            </a:solidFill>
+          </a:ln>
+        </p:spPr>
+        <p:style>
+          <a:lnRef idx="2">
+            <a:schemeClr val="accent1">
+              <a:shade val="50000"/>
+            </a:schemeClr>
+          </a:lnRef>
+          <a:fillRef idx="1">
+            <a:schemeClr val="accent1"/>
+          </a:fillRef>
+          <a:effectRef idx="0">
+            <a:schemeClr val="accent1"/>
+          </a:effectRef>
+          <a:fontRef idx="minor">
+            <a:schemeClr val="lt1"/>
+          </a:fontRef>
+        </p:style>
+        <p:txBody>
+          <a:bodyPr rtlCol="0" anchor="ctr"/>
+          <a:lstStyle/>
+          <a:p>
+            <a:pPr algn="ctr"/>
+            <a:endParaRPr lang="ru-RU"/>
+          </a:p>
+        </p:txBody>
+      </p:sp>
+      <p:sp>
+        <p:nvSpPr>
+          <p:cNvPr id="31" name="Rectangle 30">
+            <a:extLst>
+              <a:ext uri="{FF2B5EF4-FFF2-40B4-BE49-F238E27FC236}">
+                <a16:creationId xmlns:a16="http://schemas.microsoft.com/office/drawing/2014/main" id="{5520AFB4-59E4-4750-9FB8-5D010C2AA5B3}"/>
+              </a:ext>
+            </a:extLst>
+          </p:cNvPr>
+          <p:cNvSpPr/>
+          <p:nvPr/>
+        </p:nvSpPr>
+        <p:spPr>
+          <a:xfrm>
+            <a:off x="10061089" y="3599897"/>
+            <a:ext cx="9220201" cy="514302"/>
+          </a:xfrm>
+          <a:prstGeom prst="rect">
+            <a:avLst/>
+          </a:prstGeom>
+          <a:noFill/>
+          <a:ln>
+            <a:solidFill>
+              <a:schemeClr val="tx1"/>
+            </a:solidFill>
+          </a:ln>
+        </p:spPr>
+        <p:style>
+          <a:lnRef idx="2">
+            <a:schemeClr val="accent1">
+              <a:shade val="50000"/>
+            </a:schemeClr>
+          </a:lnRef>
+          <a:fillRef idx="1">
+            <a:schemeClr val="accent1"/>
+          </a:fillRef>
+          <a:effectRef idx="0">
+            <a:schemeClr val="accent1"/>
+          </a:effectRef>
+          <a:fontRef idx="minor">
+            <a:schemeClr val="lt1"/>
+          </a:fontRef>
+        </p:style>
+        <p:txBody>
+          <a:bodyPr rtlCol="0" anchor="ctr"/>
+          <a:lstStyle/>
+          <a:p>
+            <a:pPr algn="ctr"/>
+            <a:endParaRPr lang="ru-RU"/>
+          </a:p>
+        </p:txBody>
+      </p:sp>
+      <p:sp>
+        <p:nvSpPr>
+          <p:cNvPr id="33" name="Rectangle 32">
+            <a:extLst>
+              <a:ext uri="{FF2B5EF4-FFF2-40B4-BE49-F238E27FC236}">
+                <a16:creationId xmlns:a16="http://schemas.microsoft.com/office/drawing/2014/main" id="{4A0950AC-E202-4AC6-9BE9-C5EC29F03821}"/>
+              </a:ext>
+            </a:extLst>
+          </p:cNvPr>
+          <p:cNvSpPr/>
+          <p:nvPr/>
+        </p:nvSpPr>
+        <p:spPr>
+          <a:xfrm>
+            <a:off x="10061089" y="4102785"/>
+            <a:ext cx="9220201" cy="868828"/>
+          </a:xfrm>
+          <a:prstGeom prst="rect">
+            <a:avLst/>
+          </a:prstGeom>
+          <a:noFill/>
+          <a:ln>
+            <a:solidFill>
+              <a:schemeClr val="tx1"/>
+            </a:solidFill>
+          </a:ln>
+        </p:spPr>
+        <p:style>
+          <a:lnRef idx="2">
+            <a:schemeClr val="accent1">
+              <a:shade val="50000"/>
+            </a:schemeClr>
+          </a:lnRef>
+          <a:fillRef idx="1">
+            <a:schemeClr val="accent1"/>
+          </a:fillRef>
+          <a:effectRef idx="0">
+            <a:schemeClr val="accent1"/>
+          </a:effectRef>
+          <a:fontRef idx="minor">
+            <a:schemeClr val="lt1"/>
+          </a:fontRef>
+        </p:style>
+        <p:txBody>
+          <a:bodyPr rtlCol="0" anchor="ctr"/>
+          <a:lstStyle/>
+          <a:p>
+            <a:pPr algn="ctr"/>
+            <a:endParaRPr lang="ru-RU"/>
+          </a:p>
+        </p:txBody>
+      </p:sp>
+      <p:sp>
+        <p:nvSpPr>
+          <p:cNvPr id="34" name="Rectangle 33">
+            <a:extLst>
+              <a:ext uri="{FF2B5EF4-FFF2-40B4-BE49-F238E27FC236}">
+                <a16:creationId xmlns:a16="http://schemas.microsoft.com/office/drawing/2014/main" id="{9DBD31A8-78EC-4BF4-92AC-C6A7A002A1D4}"/>
+              </a:ext>
+            </a:extLst>
+          </p:cNvPr>
+          <p:cNvSpPr/>
+          <p:nvPr/>
+        </p:nvSpPr>
+        <p:spPr>
+          <a:xfrm>
+            <a:off x="9941250" y="6613024"/>
+            <a:ext cx="9940600" cy="868827"/>
+          </a:xfrm>
+          <a:prstGeom prst="rect">
+            <a:avLst/>
+          </a:prstGeom>
+          <a:noFill/>
+          <a:ln>
+            <a:solidFill>
+              <a:schemeClr val="tx1"/>
+            </a:solidFill>
+          </a:ln>
+        </p:spPr>
+        <p:style>
+          <a:lnRef idx="2">
+            <a:schemeClr val="accent1">
+              <a:shade val="50000"/>
+            </a:schemeClr>
+          </a:lnRef>
+          <a:fillRef idx="1">
+            <a:schemeClr val="accent1"/>
+          </a:fillRef>
+          <a:effectRef idx="0">
+            <a:schemeClr val="accent1"/>
+          </a:effectRef>
+          <a:fontRef idx="minor">
+            <a:schemeClr val="lt1"/>
+          </a:fontRef>
+        </p:style>
+        <p:txBody>
+          <a:bodyPr rtlCol="0" anchor="ctr"/>
+          <a:lstStyle/>
+          <a:p>
+            <a:pPr algn="ctr"/>
+            <a:endParaRPr lang="ru-RU"/>
+          </a:p>
+        </p:txBody>
+      </p:sp>
+      <p:sp>
+        <p:nvSpPr>
+          <p:cNvPr id="36" name="Rectangle 35">
+            <a:extLst>
+              <a:ext uri="{FF2B5EF4-FFF2-40B4-BE49-F238E27FC236}">
+                <a16:creationId xmlns:a16="http://schemas.microsoft.com/office/drawing/2014/main" id="{EAE0EA72-51DF-4038-89DC-170ED5C00914}"/>
+              </a:ext>
+            </a:extLst>
+          </p:cNvPr>
+          <p:cNvSpPr/>
+          <p:nvPr/>
+        </p:nvSpPr>
+        <p:spPr>
+          <a:xfrm>
+            <a:off x="9941250" y="8980165"/>
+            <a:ext cx="9940600" cy="844452"/>
+          </a:xfrm>
+          <a:prstGeom prst="rect">
+            <a:avLst/>
+          </a:prstGeom>
+          <a:noFill/>
+          <a:ln>
+            <a:solidFill>
+              <a:schemeClr val="tx1"/>
+            </a:solidFill>
+          </a:ln>
+        </p:spPr>
+        <p:style>
+          <a:lnRef idx="2">
+            <a:schemeClr val="accent1">
+              <a:shade val="50000"/>
+            </a:schemeClr>
+          </a:lnRef>
+          <a:fillRef idx="1">
+            <a:schemeClr val="accent1"/>
+          </a:fillRef>
+          <a:effectRef idx="0">
+            <a:schemeClr val="accent1"/>
+          </a:effectRef>
+          <a:fontRef idx="minor">
+            <a:schemeClr val="lt1"/>
+          </a:fontRef>
+        </p:style>
+        <p:txBody>
+          <a:bodyPr rtlCol="0" anchor="ctr"/>
+          <a:lstStyle/>
+          <a:p>
+            <a:pPr algn="ctr"/>
+            <a:endParaRPr lang="ru-RU"/>
+          </a:p>
+        </p:txBody>
+      </p:sp>
+      <p:sp>
+        <p:nvSpPr>
+          <p:cNvPr id="37" name="Rectangle 36">
+            <a:extLst>
+              <a:ext uri="{FF2B5EF4-FFF2-40B4-BE49-F238E27FC236}">
+                <a16:creationId xmlns:a16="http://schemas.microsoft.com/office/drawing/2014/main" id="{2C9704A0-A2A7-4F9A-99DD-4E5CA1BBE3E5}"/>
+              </a:ext>
+            </a:extLst>
+          </p:cNvPr>
+          <p:cNvSpPr/>
+          <p:nvPr/>
+        </p:nvSpPr>
+        <p:spPr>
+          <a:xfrm>
+            <a:off x="9941250" y="9819438"/>
+            <a:ext cx="9940600" cy="868827"/>
+          </a:xfrm>
+          <a:prstGeom prst="rect">
+            <a:avLst/>
+          </a:prstGeom>
+          <a:noFill/>
+          <a:ln>
+            <a:solidFill>
+              <a:schemeClr val="tx1"/>
+            </a:solidFill>
+          </a:ln>
+        </p:spPr>
+        <p:style>
+          <a:lnRef idx="2">
+            <a:schemeClr val="accent1">
+              <a:shade val="50000"/>
+            </a:schemeClr>
+          </a:lnRef>
+          <a:fillRef idx="1">
+            <a:schemeClr val="accent1"/>
+          </a:fillRef>
+          <a:effectRef idx="0">
+            <a:schemeClr val="accent1"/>
+          </a:effectRef>
+          <a:fontRef idx="minor">
+            <a:schemeClr val="lt1"/>
+          </a:fontRef>
+        </p:style>
+        <p:txBody>
+          <a:bodyPr rtlCol="0" anchor="ctr"/>
+          <a:lstStyle/>
+          <a:p>
+            <a:pPr algn="ctr"/>
+            <a:endParaRPr lang="ru-RU"/>
+          </a:p>
+        </p:txBody>
+      </p:sp>
+      <p:sp>
+        <p:nvSpPr>
+          <p:cNvPr id="32" name="TextBox 31">
+            <a:extLst>
+              <a:ext uri="{FF2B5EF4-FFF2-40B4-BE49-F238E27FC236}">
+                <a16:creationId xmlns:a16="http://schemas.microsoft.com/office/drawing/2014/main" id="{5058D764-490B-4C66-AD70-B46C2827018D}"/>
+              </a:ext>
+            </a:extLst>
+          </p:cNvPr>
+          <p:cNvSpPr txBox="1"/>
+          <p:nvPr/>
+        </p:nvSpPr>
+        <p:spPr>
+          <a:xfrm>
+            <a:off x="17085181" y="6773493"/>
+            <a:ext cx="2779772" cy="523220"/>
+          </a:xfrm>
+          <a:prstGeom prst="rect">
+            <a:avLst/>
+          </a:prstGeom>
+          <a:noFill/>
+        </p:spPr>
+        <p:txBody>
+          <a:bodyPr wrap="square" rtlCol="0">
+            <a:spAutoFit/>
+          </a:bodyPr>
+          <a:lstStyle/>
+          <a:p>
+            <a:pPr algn="ctr"/>
+            <a:r>
+              <a:rPr lang="ru-RU" sz="2800" dirty="0"/>
+              <a:t>Пролог</a:t>
+            </a:r>
+          </a:p>
+        </p:txBody>
+      </p:sp>
+      <p:sp>
+        <p:nvSpPr>
+          <p:cNvPr id="39" name="TextBox 38">
+            <a:extLst>
+              <a:ext uri="{FF2B5EF4-FFF2-40B4-BE49-F238E27FC236}">
+                <a16:creationId xmlns:a16="http://schemas.microsoft.com/office/drawing/2014/main" id="{1E1DBD64-8A34-4777-BF90-758274C9CB94}"/>
+              </a:ext>
+            </a:extLst>
+          </p:cNvPr>
+          <p:cNvSpPr txBox="1"/>
+          <p:nvPr/>
+        </p:nvSpPr>
+        <p:spPr>
+          <a:xfrm>
+            <a:off x="17222682" y="8868856"/>
+            <a:ext cx="2642271" cy="954107"/>
+          </a:xfrm>
+          <a:prstGeom prst="rect">
+            <a:avLst/>
+          </a:prstGeom>
+          <a:noFill/>
+        </p:spPr>
+        <p:txBody>
+          <a:bodyPr wrap="square" rtlCol="0">
+            <a:spAutoFit/>
+          </a:bodyPr>
+          <a:lstStyle/>
+          <a:p>
+            <a:pPr algn="ctr"/>
+            <a:r>
+              <a:rPr lang="ru-RU" sz="2800" dirty="0"/>
+              <a:t>Возвращаемое значение</a:t>
+            </a:r>
+          </a:p>
+        </p:txBody>
+      </p:sp>
+      <p:sp>
+        <p:nvSpPr>
+          <p:cNvPr id="35" name="TextBox 34">
+            <a:extLst>
+              <a:ext uri="{FF2B5EF4-FFF2-40B4-BE49-F238E27FC236}">
+                <a16:creationId xmlns:a16="http://schemas.microsoft.com/office/drawing/2014/main" id="{85D993CE-EF87-4B43-96EF-7204CB529F57}"/>
+              </a:ext>
+            </a:extLst>
+          </p:cNvPr>
+          <p:cNvSpPr txBox="1"/>
+          <p:nvPr/>
+        </p:nvSpPr>
+        <p:spPr>
+          <a:xfrm flipH="1">
+            <a:off x="725169" y="10225926"/>
+            <a:ext cx="3611881" cy="584775"/>
+          </a:xfrm>
+          <a:prstGeom prst="rect">
+            <a:avLst/>
+          </a:prstGeom>
+          <a:noFill/>
+        </p:spPr>
+        <p:txBody>
+          <a:bodyPr wrap="square" rtlCol="0">
+            <a:spAutoFit/>
+          </a:bodyPr>
+          <a:lstStyle/>
+          <a:p>
+            <a:r>
+              <a:rPr lang="ru-RU" sz="3200" dirty="0">
+                <a:hlinkClick r:id="rId6"/>
+              </a:rPr>
+              <a:t>Пример</a:t>
+            </a:r>
+            <a:endParaRPr lang="ru-RU" sz="3200" dirty="0"/>
+          </a:p>
+        </p:txBody>
+      </p:sp>
+      <p:sp>
+        <p:nvSpPr>
+          <p:cNvPr id="38" name="Freeform: Shape 37">
+            <a:extLst>
+              <a:ext uri="{FF2B5EF4-FFF2-40B4-BE49-F238E27FC236}">
+                <a16:creationId xmlns:a16="http://schemas.microsoft.com/office/drawing/2014/main" id="{D5194A12-23F3-4560-8C74-527DC60E8A1F}"/>
+              </a:ext>
+            </a:extLst>
+          </p:cNvPr>
+          <p:cNvSpPr/>
+          <p:nvPr/>
+        </p:nvSpPr>
+        <p:spPr>
+          <a:xfrm>
+            <a:off x="8956571" y="4432515"/>
+            <a:ext cx="2341693" cy="6059838"/>
+          </a:xfrm>
+          <a:custGeom>
+            <a:avLst/>
+            <a:gdLst>
+              <a:gd name="connsiteX0" fmla="*/ 2341693 w 2341693"/>
+              <a:gd name="connsiteY0" fmla="*/ 6059838 h 6059838"/>
+              <a:gd name="connsiteX1" fmla="*/ 16948 w 2341693"/>
+              <a:gd name="connsiteY1" fmla="*/ 2107770 h 6059838"/>
+              <a:gd name="connsiteX2" fmla="*/ 1334304 w 2341693"/>
+              <a:gd name="connsiteY2" fmla="*/ 0 h 6059838"/>
+            </a:gdLst>
+            <a:ahLst/>
+            <a:cxnLst>
+              <a:cxn ang="0">
+                <a:pos x="connsiteX0" y="connsiteY0"/>
+              </a:cxn>
+              <a:cxn ang="0">
+                <a:pos x="connsiteX1" y="connsiteY1"/>
+              </a:cxn>
+              <a:cxn ang="0">
+                <a:pos x="connsiteX2" y="connsiteY2"/>
+              </a:cxn>
+            </a:cxnLst>
+            <a:rect l="l" t="t" r="r" b="b"/>
+            <a:pathLst>
+              <a:path w="2341693" h="6059838">
+                <a:moveTo>
+                  <a:pt x="2341693" y="6059838"/>
+                </a:moveTo>
+                <a:cubicBezTo>
+                  <a:pt x="1263269" y="4588790"/>
+                  <a:pt x="184846" y="3117743"/>
+                  <a:pt x="16948" y="2107770"/>
+                </a:cubicBezTo>
+                <a:cubicBezTo>
+                  <a:pt x="-150950" y="1097797"/>
+                  <a:pt x="975260" y="297051"/>
+                  <a:pt x="1334304" y="0"/>
+                </a:cubicBezTo>
+              </a:path>
+            </a:pathLst>
+          </a:custGeom>
+          <a:noFill/>
+          <a:ln w="28575">
+            <a:solidFill>
+              <a:schemeClr val="tx1"/>
+            </a:solidFill>
+          </a:ln>
+        </p:spPr>
+        <p:style>
+          <a:lnRef idx="2">
+            <a:schemeClr val="accent1">
+              <a:shade val="50000"/>
+            </a:schemeClr>
+          </a:lnRef>
+          <a:fillRef idx="1">
+            <a:schemeClr val="accent1"/>
+          </a:fillRef>
+          <a:effectRef idx="0">
+            <a:schemeClr val="accent1"/>
+          </a:effectRef>
+          <a:fontRef idx="minor">
+            <a:schemeClr val="lt1"/>
+          </a:fontRef>
+        </p:style>
+        <p:txBody>
+          <a:bodyPr rtlCol="0" anchor="ctr"/>
+          <a:lstStyle/>
+          <a:p>
+            <a:pPr algn="ctr"/>
+            <a:endParaRPr lang="ru-RU"/>
+          </a:p>
+        </p:txBody>
+      </p:sp>
+      <p:cxnSp>
+        <p:nvCxnSpPr>
+          <p:cNvPr id="41" name="Straight Arrow Connector 40">
+            <a:extLst>
+              <a:ext uri="{FF2B5EF4-FFF2-40B4-BE49-F238E27FC236}">
+                <a16:creationId xmlns:a16="http://schemas.microsoft.com/office/drawing/2014/main" id="{C00878DE-5275-4ADF-AAD9-968EE8488EDD}"/>
+              </a:ext>
+            </a:extLst>
+          </p:cNvPr>
+          <p:cNvCxnSpPr/>
+          <p:nvPr/>
+        </p:nvCxnSpPr>
+        <p:spPr>
+          <a:xfrm flipH="1">
+            <a:off x="9823014" y="3890075"/>
+            <a:ext cx="498857" cy="542440"/>
+          </a:xfrm>
+          <a:prstGeom prst="straightConnector1">
+            <a:avLst/>
+          </a:prstGeom>
+          <a:ln w="57150">
+            <a:solidFill>
+              <a:schemeClr val="tx1"/>
+            </a:solidFill>
+            <a:tailEnd type="triangle"/>
+          </a:ln>
+        </p:spPr>
+        <p:style>
+          <a:lnRef idx="1">
+            <a:schemeClr val="accent1"/>
+          </a:lnRef>
+          <a:fillRef idx="0">
+            <a:schemeClr val="accent1"/>
+          </a:fillRef>
+          <a:effectRef idx="0">
+            <a:schemeClr val="accent1"/>
+          </a:effectRef>
+          <a:fontRef idx="minor">
+            <a:schemeClr val="tx1"/>
+          </a:fontRef>
+        </p:style>
+      </p:cxnSp>
+      <p:cxnSp>
+        <p:nvCxnSpPr>
+          <p:cNvPr id="44" name="Straight Arrow Connector 43">
+            <a:extLst>
+              <a:ext uri="{FF2B5EF4-FFF2-40B4-BE49-F238E27FC236}">
+                <a16:creationId xmlns:a16="http://schemas.microsoft.com/office/drawing/2014/main" id="{D7E03513-46CE-4D6C-BB19-9BA20F4F298F}"/>
+              </a:ext>
+            </a:extLst>
+          </p:cNvPr>
+          <p:cNvCxnSpPr>
+            <a:cxnSpLocks/>
+            <a:endCxn id="38" idx="2"/>
+          </p:cNvCxnSpPr>
+          <p:nvPr/>
+        </p:nvCxnSpPr>
+        <p:spPr>
+          <a:xfrm flipV="1">
+            <a:off x="9787015" y="4432515"/>
+            <a:ext cx="503860" cy="483638"/>
+          </a:xfrm>
+          <a:prstGeom prst="straightConnector1">
+            <a:avLst/>
+          </a:prstGeom>
+          <a:ln w="57150">
+            <a:solidFill>
+              <a:schemeClr val="tx1"/>
+            </a:solidFill>
+            <a:tailEnd type="triangle"/>
+          </a:ln>
+        </p:spPr>
+        <p:style>
+          <a:lnRef idx="1">
+            <a:schemeClr val="accent1"/>
+          </a:lnRef>
+          <a:fillRef idx="0">
+            <a:schemeClr val="accent1"/>
+          </a:fillRef>
+          <a:effectRef idx="0">
+            <a:schemeClr val="accent1"/>
+          </a:effectRef>
+          <a:fontRef idx="minor">
+            <a:schemeClr val="tx1"/>
+          </a:fontRef>
+        </p:style>
+      </p:cxnSp>
+      <p:cxnSp>
+        <p:nvCxnSpPr>
+          <p:cNvPr id="51" name="Straight Arrow Connector 50">
+            <a:extLst>
+              <a:ext uri="{FF2B5EF4-FFF2-40B4-BE49-F238E27FC236}">
+                <a16:creationId xmlns:a16="http://schemas.microsoft.com/office/drawing/2014/main" id="{97E6666D-BE29-4B78-B949-43114AF8FD68}"/>
+              </a:ext>
+            </a:extLst>
+          </p:cNvPr>
+          <p:cNvCxnSpPr>
+            <a:cxnSpLocks/>
+          </p:cNvCxnSpPr>
+          <p:nvPr/>
+        </p:nvCxnSpPr>
+        <p:spPr>
+          <a:xfrm>
+            <a:off x="9671050" y="5892402"/>
+            <a:ext cx="270200" cy="575392"/>
+          </a:xfrm>
+          <a:prstGeom prst="straightConnector1">
+            <a:avLst/>
+          </a:prstGeom>
+          <a:ln w="57150">
+            <a:solidFill>
+              <a:schemeClr val="tx1"/>
+            </a:solidFill>
+            <a:tailEnd type="triangle"/>
+          </a:ln>
+        </p:spPr>
+        <p:style>
+          <a:lnRef idx="1">
+            <a:schemeClr val="accent1"/>
+          </a:lnRef>
+          <a:fillRef idx="0">
+            <a:schemeClr val="accent1"/>
+          </a:fillRef>
+          <a:effectRef idx="0">
+            <a:schemeClr val="accent1"/>
+          </a:effectRef>
+          <a:fontRef idx="minor">
+            <a:schemeClr val="tx1"/>
+          </a:fontRef>
+        </p:style>
+      </p:cxnSp>
+      <p:cxnSp>
+        <p:nvCxnSpPr>
+          <p:cNvPr id="55" name="Straight Arrow Connector 54">
+            <a:extLst>
+              <a:ext uri="{FF2B5EF4-FFF2-40B4-BE49-F238E27FC236}">
+                <a16:creationId xmlns:a16="http://schemas.microsoft.com/office/drawing/2014/main" id="{C5160C27-B865-476C-94BA-463FD4217F71}"/>
+              </a:ext>
+            </a:extLst>
+          </p:cNvPr>
+          <p:cNvCxnSpPr>
+            <a:cxnSpLocks/>
+          </p:cNvCxnSpPr>
+          <p:nvPr/>
+        </p:nvCxnSpPr>
+        <p:spPr>
+          <a:xfrm flipH="1" flipV="1">
+            <a:off x="10791848" y="9819438"/>
+            <a:ext cx="499350" cy="698875"/>
+          </a:xfrm>
+          <a:prstGeom prst="straightConnector1">
+            <a:avLst/>
+          </a:prstGeom>
+          <a:ln w="57150">
+            <a:solidFill>
+              <a:schemeClr val="tx1"/>
+            </a:solidFill>
+            <a:tailEnd type="triangle"/>
+          </a:ln>
+        </p:spPr>
+        <p:style>
+          <a:lnRef idx="1">
+            <a:schemeClr val="accent1"/>
+          </a:lnRef>
+          <a:fillRef idx="0">
+            <a:schemeClr val="accent1"/>
+          </a:fillRef>
+          <a:effectRef idx="0">
+            <a:schemeClr val="accent1"/>
+          </a:effectRef>
+          <a:fontRef idx="minor">
+            <a:schemeClr val="tx1"/>
+          </a:fontRef>
+        </p:style>
+      </p:cxnSp>
+      <p:sp>
+        <p:nvSpPr>
+          <p:cNvPr id="56" name="Rectangle 55">
+            <a:extLst>
+              <a:ext uri="{FF2B5EF4-FFF2-40B4-BE49-F238E27FC236}">
+                <a16:creationId xmlns:a16="http://schemas.microsoft.com/office/drawing/2014/main" id="{2CB44B2B-B7A4-4BBE-B8FB-4DBE0B7FA7EE}"/>
+              </a:ext>
+            </a:extLst>
+          </p:cNvPr>
+          <p:cNvSpPr/>
+          <p:nvPr/>
+        </p:nvSpPr>
+        <p:spPr>
+          <a:xfrm>
+            <a:off x="9941250" y="6170371"/>
+            <a:ext cx="9940600" cy="4517894"/>
+          </a:xfrm>
+          <a:prstGeom prst="rect">
+            <a:avLst/>
+          </a:prstGeom>
+          <a:noFill/>
+          <a:ln>
+            <a:solidFill>
+              <a:schemeClr val="tx1"/>
+            </a:solidFill>
+          </a:ln>
+        </p:spPr>
+        <p:style>
+          <a:lnRef idx="2">
+            <a:schemeClr val="accent1">
+              <a:shade val="50000"/>
+            </a:schemeClr>
+          </a:lnRef>
+          <a:fillRef idx="1">
+            <a:schemeClr val="accent1"/>
+          </a:fillRef>
+          <a:effectRef idx="0">
+            <a:schemeClr val="accent1"/>
+          </a:effectRef>
+          <a:fontRef idx="minor">
+            <a:schemeClr val="lt1"/>
+          </a:fontRef>
+        </p:style>
+        <p:txBody>
+          <a:bodyPr rtlCol="0" anchor="ctr"/>
+          <a:lstStyle/>
+          <a:p>
+            <a:pPr algn="ctr"/>
+            <a:endParaRPr lang="ru-RU"/>
+          </a:p>
+        </p:txBody>
+      </p:sp>
+      <p:sp>
+        <p:nvSpPr>
+          <p:cNvPr id="60" name="Rectangle 59">
+            <a:extLst>
+              <a:ext uri="{FF2B5EF4-FFF2-40B4-BE49-F238E27FC236}">
+                <a16:creationId xmlns:a16="http://schemas.microsoft.com/office/drawing/2014/main" id="{32F05395-89C7-42F2-B9A8-537F0EA8B5FF}"/>
+              </a:ext>
+            </a:extLst>
+          </p:cNvPr>
+          <p:cNvSpPr/>
+          <p:nvPr/>
+        </p:nvSpPr>
+        <p:spPr>
+          <a:xfrm>
+            <a:off x="10061089" y="2263775"/>
+            <a:ext cx="9211161" cy="2707838"/>
+          </a:xfrm>
+          <a:prstGeom prst="rect">
+            <a:avLst/>
+          </a:prstGeom>
+          <a:noFill/>
+          <a:ln w="28575">
+            <a:solidFill>
+              <a:schemeClr val="tx1"/>
+            </a:solidFill>
+          </a:ln>
+        </p:spPr>
+        <p:style>
+          <a:lnRef idx="2">
+            <a:schemeClr val="accent1">
+              <a:shade val="50000"/>
+            </a:schemeClr>
+          </a:lnRef>
+          <a:fillRef idx="1">
+            <a:schemeClr val="accent1"/>
+          </a:fillRef>
+          <a:effectRef idx="0">
+            <a:schemeClr val="accent1"/>
+          </a:effectRef>
+          <a:fontRef idx="minor">
+            <a:schemeClr val="lt1"/>
+          </a:fontRef>
+        </p:style>
+        <p:txBody>
+          <a:bodyPr rtlCol="0" anchor="ctr"/>
+          <a:lstStyle/>
+          <a:p>
+            <a:pPr algn="ctr"/>
+            <a:endParaRPr lang="ru-RU"/>
+          </a:p>
+        </p:txBody>
+      </p:sp>
+      <p:sp>
+        <p:nvSpPr>
+          <p:cNvPr id="61" name="TextBox 60">
+            <a:extLst>
+              <a:ext uri="{FF2B5EF4-FFF2-40B4-BE49-F238E27FC236}">
+                <a16:creationId xmlns:a16="http://schemas.microsoft.com/office/drawing/2014/main" id="{43E8759B-74C8-41E9-A267-2588E426EB4D}"/>
+              </a:ext>
+            </a:extLst>
+          </p:cNvPr>
+          <p:cNvSpPr txBox="1"/>
+          <p:nvPr/>
+        </p:nvSpPr>
+        <p:spPr>
+          <a:xfrm>
+            <a:off x="17900107" y="9964316"/>
+            <a:ext cx="1258678" cy="523220"/>
+          </a:xfrm>
+          <a:prstGeom prst="rect">
+            <a:avLst/>
+          </a:prstGeom>
+          <a:noFill/>
+        </p:spPr>
+        <p:txBody>
+          <a:bodyPr wrap="none" rtlCol="0">
+            <a:spAutoFit/>
+          </a:bodyPr>
+          <a:lstStyle/>
+          <a:p>
+            <a:r>
+              <a:rPr lang="ru-RU" sz="2800" dirty="0"/>
+              <a:t>Эпилог</a:t>
+            </a:r>
+          </a:p>
+        </p:txBody>
+      </p:sp>
+    </p:spTree>
+    <p:extLst>
+      <p:ext uri="{BB962C8B-B14F-4D97-AF65-F5344CB8AC3E}">
+        <p14:creationId xmlns:p14="http://schemas.microsoft.com/office/powerpoint/2010/main" val="4204110925"/>
+      </p:ext>
+    </p:extLst>
+  </p:cSld>
+  <p:clrMapOvr>
+    <a:masterClrMapping/>
+  </p:clrMapOvr>
+</p:sld>
+</file>
+
+<file path=ppt/slides/slide15.xml><?xml version="1.0" encoding="utf-8"?>
 <p:sld xmlns:a="http://schemas.openxmlformats.org/drawingml/2006/main" xmlns:r="http://schemas.openxmlformats.org/officeDocument/2006/relationships" xmlns:p="http://schemas.openxmlformats.org/presentationml/2006/main" showMasterSp="0">
   <p:cSld>
     <p:spTree>
@@ -4525,8 +5745,8 @@
         </p:nvSpPr>
         <p:spPr>
           <a:xfrm>
-            <a:off x="1076272" y="7888211"/>
-            <a:ext cx="8353425" cy="1873885"/>
+            <a:off x="1060450" y="7135975"/>
+            <a:ext cx="8353425" cy="4040850"/>
           </a:xfrm>
           <a:prstGeom prst="rect">
             <a:avLst/>
@@ -4639,7 +5859,7 @@
               </a:tabLst>
             </a:pPr>
             <a:r>
-              <a:rPr sz="3950" u="heavy" spc="65" dirty="0">
+              <a:rPr sz="3950" u="heavy" spc="65" dirty="0" err="1">
                 <a:uFill>
                   <a:solidFill>
                     <a:srgbClr val="000000"/>
@@ -4676,6 +5896,49 @@
                 <a:hlinkClick r:id="rId3"/>
               </a:rPr>
               <a:t>ABI</a:t>
+            </a:r>
+            <a:endParaRPr lang="en-US" sz="3950" u="heavy" spc="-50" dirty="0">
+              <a:uFill>
+                <a:solidFill>
+                  <a:srgbClr val="000000"/>
+                </a:solidFill>
+              </a:uFill>
+              <a:latin typeface="Microsoft Sans Serif"/>
+              <a:cs typeface="Microsoft Sans Serif"/>
+            </a:endParaRPr>
+          </a:p>
+          <a:p>
+            <a:pPr marL="473075" indent="-461009">
+              <a:lnSpc>
+                <a:spcPct val="100000"/>
+              </a:lnSpc>
+              <a:spcBef>
+                <a:spcPts val="2535"/>
+              </a:spcBef>
+              <a:buChar char="•"/>
+              <a:tabLst>
+                <a:tab pos="473075" algn="l"/>
+                <a:tab pos="473709" algn="l"/>
+              </a:tabLst>
+            </a:pPr>
+            <a:r>
+              <a:rPr lang="en-US" sz="4000" dirty="0">
+                <a:solidFill>
+                  <a:srgbClr val="202122"/>
+                </a:solidFill>
+                <a:latin typeface="Arial" panose="020B0604020202020204" pitchFamily="34" charset="0"/>
+              </a:rPr>
+              <a:t>T</a:t>
+            </a:r>
+            <a:r>
+              <a:rPr lang="en-US" sz="4000" b="0" i="0" dirty="0">
+                <a:solidFill>
+                  <a:srgbClr val="202122"/>
+                </a:solidFill>
+                <a:effectLst/>
+                <a:latin typeface="Arial" panose="020B0604020202020204" pitchFamily="34" charset="0"/>
+              </a:rPr>
+              <a:t>he stack is additionally 16-byte aligned just before the call instruction is called.</a:t>
             </a:r>
             <a:endParaRPr sz="3950" dirty="0">
               <a:latin typeface="Microsoft Sans Serif"/>
@@ -4720,7 +5983,7 @@
         </p:blipFill>
         <p:spPr>
           <a:xfrm>
-            <a:off x="2592097" y="2480788"/>
+            <a:off x="2584450" y="2322807"/>
             <a:ext cx="6047606" cy="4813168"/>
           </a:xfrm>
           <a:prstGeom prst="rect">
@@ -4736,7 +5999,7 @@
 </p:sld>
 </file>
 
-<file path=ppt/slides/slide15.xml><?xml version="1.0" encoding="utf-8"?>
+<file path=ppt/slides/slide16.xml><?xml version="1.0" encoding="utf-8"?>
 <p:sld xmlns:a="http://schemas.openxmlformats.org/drawingml/2006/main" xmlns:r="http://schemas.openxmlformats.org/officeDocument/2006/relationships" xmlns:p="http://schemas.openxmlformats.org/presentationml/2006/main" showMasterSp="0">
   <p:cSld>
     <p:spTree>
@@ -4986,7 +6249,7 @@
               <a:t> </a:t>
             </a:r>
             <a:r>
-              <a:rPr sz="4400" spc="170" dirty="0">
+              <a:rPr sz="4400" spc="170" dirty="0" err="1">
                 <a:latin typeface="Arial" panose="020B0604020202020204" pitchFamily="34" charset="0"/>
                 <a:cs typeface="Arial" panose="020B0604020202020204" pitchFamily="34" charset="0"/>
               </a:rPr>
@@ -5004,7 +6267,21 @@
                 <a:latin typeface="Arial" panose="020B0604020202020204" pitchFamily="34" charset="0"/>
                 <a:cs typeface="Arial" panose="020B0604020202020204" pitchFamily="34" charset="0"/>
               </a:rPr>
-              <a:t>(z.B.</a:t>
+              <a:t>(</a:t>
+            </a:r>
+            <a:r>
+              <a:rPr lang="en-US" sz="4400" spc="-50" dirty="0">
+                <a:latin typeface="Arial" panose="020B0604020202020204" pitchFamily="34" charset="0"/>
+                <a:cs typeface="Arial" panose="020B0604020202020204" pitchFamily="34" charset="0"/>
+              </a:rPr>
+              <a:t>e.g</a:t>
+            </a:r>
+            <a:r>
+              <a:rPr sz="4400" spc="-50" dirty="0">
+                <a:latin typeface="Arial" panose="020B0604020202020204" pitchFamily="34" charset="0"/>
+                <a:cs typeface="Arial" panose="020B0604020202020204" pitchFamily="34" charset="0"/>
+              </a:rPr>
+              <a:t>.</a:t>
             </a:r>
             <a:r>
               <a:rPr sz="4400" spc="-10" dirty="0">
@@ -5191,7 +6468,7 @@
 </p:sld>
 </file>
 
-<file path=ppt/slides/slide16.xml><?xml version="1.0" encoding="utf-8"?>
+<file path=ppt/slides/slide17.xml><?xml version="1.0" encoding="utf-8"?>
 <p:sld xmlns:a="http://schemas.openxmlformats.org/drawingml/2006/main" xmlns:r="http://schemas.openxmlformats.org/officeDocument/2006/relationships" xmlns:p="http://schemas.openxmlformats.org/presentationml/2006/main">
   <p:cSld>
     <p:spTree>
@@ -5461,7 +6738,7 @@
 </p:sld>
 </file>
 
-<file path=ppt/slides/slide17.xml><?xml version="1.0" encoding="utf-8"?>
+<file path=ppt/slides/slide18.xml><?xml version="1.0" encoding="utf-8"?>
 <p:sld xmlns:a="http://schemas.openxmlformats.org/drawingml/2006/main" xmlns:r="http://schemas.openxmlformats.org/officeDocument/2006/relationships" xmlns:p="http://schemas.openxmlformats.org/presentationml/2006/main" showMasterSp="0">
   <p:cSld>
     <p:spTree>
@@ -5825,7 +7102,7 @@
 </p:sld>
 </file>
 
-<file path=ppt/slides/slide18.xml><?xml version="1.0" encoding="utf-8"?>
+<file path=ppt/slides/slide19.xml><?xml version="1.0" encoding="utf-8"?>
 <p:sld xmlns:a="http://schemas.openxmlformats.org/drawingml/2006/main" xmlns:r="http://schemas.openxmlformats.org/officeDocument/2006/relationships" xmlns:p="http://schemas.openxmlformats.org/presentationml/2006/main">
   <p:cSld>
     <p:spTree>
@@ -5972,7 +7249,357 @@
 </p:sld>
 </file>
 
-<file path=ppt/slides/slide19.xml><?xml version="1.0" encoding="utf-8"?>
+<file path=ppt/slides/slide2.xml><?xml version="1.0" encoding="utf-8"?>
+<p:sld xmlns:a="http://schemas.openxmlformats.org/drawingml/2006/main" xmlns:r="http://schemas.openxmlformats.org/officeDocument/2006/relationships" xmlns:p="http://schemas.openxmlformats.org/presentationml/2006/main" showMasterSp="0">
+  <p:cSld>
+    <p:spTree>
+      <p:nvGrpSpPr>
+        <p:cNvPr id="1" name=""/>
+        <p:cNvGrpSpPr/>
+        <p:nvPr/>
+      </p:nvGrpSpPr>
+      <p:grpSpPr>
+        <a:xfrm>
+          <a:off x="0" y="0"/>
+          <a:ext cx="0" cy="0"/>
+          <a:chOff x="0" y="0"/>
+          <a:chExt cx="0" cy="0"/>
+        </a:xfrm>
+      </p:grpSpPr>
+      <p:sp>
+        <p:nvSpPr>
+          <p:cNvPr id="2" name="object 2"/>
+          <p:cNvSpPr txBox="1">
+            <a:spLocks noGrp="1"/>
+          </p:cNvSpPr>
+          <p:nvPr>
+            <p:ph type="title"/>
+          </p:nvPr>
+        </p:nvSpPr>
+        <p:spPr>
+          <a:xfrm>
+            <a:off x="3936086" y="821620"/>
+            <a:ext cx="12219940" cy="1081405"/>
+          </a:xfrm>
+          <a:prstGeom prst="rect">
+            <a:avLst/>
+          </a:prstGeom>
+        </p:spPr>
+        <p:txBody>
+          <a:bodyPr vert="horz" wrap="square" lIns="0" tIns="15875" rIns="0" bIns="0" rtlCol="0">
+            <a:spAutoFit/>
+          </a:bodyPr>
+          <a:lstStyle/>
+          <a:p>
+            <a:pPr marL="12700">
+              <a:lnSpc>
+                <a:spcPct val="100000"/>
+              </a:lnSpc>
+              <a:spcBef>
+                <a:spcPts val="125"/>
+              </a:spcBef>
+            </a:pPr>
+            <a:r>
+              <a:rPr spc="-190" dirty="0"/>
+              <a:t>Стади</a:t>
+            </a:r>
+            <a:r>
+              <a:rPr spc="20" dirty="0"/>
+              <a:t>и</a:t>
+            </a:r>
+            <a:r>
+              <a:rPr spc="-800" dirty="0"/>
+              <a:t> </a:t>
+            </a:r>
+            <a:r>
+              <a:rPr spc="-195" dirty="0"/>
+              <a:t>изучени</a:t>
+            </a:r>
+            <a:r>
+              <a:rPr spc="15" dirty="0"/>
+              <a:t>я</a:t>
+            </a:r>
+            <a:r>
+              <a:rPr spc="-795" dirty="0"/>
+              <a:t> </a:t>
+            </a:r>
+            <a:r>
+              <a:rPr spc="-200" dirty="0"/>
+              <a:t>ассемблера</a:t>
+            </a:r>
+          </a:p>
+        </p:txBody>
+      </p:sp>
+      <p:sp>
+        <p:nvSpPr>
+          <p:cNvPr id="3" name="object 3"/>
+          <p:cNvSpPr txBox="1"/>
+          <p:nvPr/>
+        </p:nvSpPr>
+        <p:spPr>
+          <a:xfrm>
+            <a:off x="4440916" y="3690828"/>
+            <a:ext cx="4166235" cy="3207385"/>
+          </a:xfrm>
+          <a:prstGeom prst="rect">
+            <a:avLst/>
+          </a:prstGeom>
+        </p:spPr>
+        <p:txBody>
+          <a:bodyPr vert="horz" wrap="square" lIns="0" tIns="341630" rIns="0" bIns="0" rtlCol="0">
+            <a:spAutoFit/>
+          </a:bodyPr>
+          <a:lstStyle/>
+          <a:p>
+            <a:pPr marL="901065" indent="-889000">
+              <a:lnSpc>
+                <a:spcPct val="100000"/>
+              </a:lnSpc>
+              <a:spcBef>
+                <a:spcPts val="2690"/>
+              </a:spcBef>
+              <a:buFont typeface="Microsoft Sans Serif"/>
+              <a:buAutoNum type="arabicPeriod"/>
+              <a:tabLst>
+                <a:tab pos="901065" algn="l"/>
+                <a:tab pos="901700" algn="l"/>
+              </a:tabLst>
+            </a:pPr>
+            <a:r>
+              <a:rPr sz="4800" spc="-195" dirty="0">
+                <a:latin typeface="Lucida Sans Unicode"/>
+                <a:cs typeface="Lucida Sans Unicode"/>
+              </a:rPr>
+              <a:t>Понимание</a:t>
+            </a:r>
+            <a:endParaRPr sz="4800">
+              <a:latin typeface="Lucida Sans Unicode"/>
+              <a:cs typeface="Lucida Sans Unicode"/>
+            </a:endParaRPr>
+          </a:p>
+          <a:p>
+            <a:pPr marL="901065" indent="-889000">
+              <a:lnSpc>
+                <a:spcPct val="100000"/>
+              </a:lnSpc>
+              <a:spcBef>
+                <a:spcPts val="2590"/>
+              </a:spcBef>
+              <a:buAutoNum type="arabicPeriod"/>
+              <a:tabLst>
+                <a:tab pos="901065" algn="l"/>
+                <a:tab pos="901700" algn="l"/>
+              </a:tabLst>
+            </a:pPr>
+            <a:r>
+              <a:rPr sz="4800" spc="55" dirty="0">
+                <a:latin typeface="Microsoft Sans Serif"/>
+                <a:cs typeface="Microsoft Sans Serif"/>
+              </a:rPr>
+              <a:t>Read-only</a:t>
+            </a:r>
+            <a:endParaRPr sz="4800">
+              <a:latin typeface="Microsoft Sans Serif"/>
+              <a:cs typeface="Microsoft Sans Serif"/>
+            </a:endParaRPr>
+          </a:p>
+          <a:p>
+            <a:pPr marL="901065" indent="-889000">
+              <a:lnSpc>
+                <a:spcPct val="100000"/>
+              </a:lnSpc>
+              <a:spcBef>
+                <a:spcPts val="2590"/>
+              </a:spcBef>
+              <a:buAutoNum type="arabicPeriod"/>
+              <a:tabLst>
+                <a:tab pos="901065" algn="l"/>
+                <a:tab pos="901700" algn="l"/>
+              </a:tabLst>
+            </a:pPr>
+            <a:r>
+              <a:rPr sz="4800" spc="80" dirty="0">
+                <a:latin typeface="Microsoft Sans Serif"/>
+                <a:cs typeface="Microsoft Sans Serif"/>
+              </a:rPr>
+              <a:t>Read-write</a:t>
+            </a:r>
+            <a:endParaRPr sz="4800">
+              <a:latin typeface="Microsoft Sans Serif"/>
+              <a:cs typeface="Microsoft Sans Serif"/>
+            </a:endParaRPr>
+          </a:p>
+        </p:txBody>
+      </p:sp>
+      <p:sp>
+        <p:nvSpPr>
+          <p:cNvPr id="4" name="object 4"/>
+          <p:cNvSpPr txBox="1"/>
+          <p:nvPr/>
+        </p:nvSpPr>
+        <p:spPr>
+          <a:xfrm>
+            <a:off x="12251680" y="3737983"/>
+            <a:ext cx="4234180" cy="3795395"/>
+          </a:xfrm>
+          <a:prstGeom prst="rect">
+            <a:avLst/>
+          </a:prstGeom>
+        </p:spPr>
+        <p:txBody>
+          <a:bodyPr vert="horz" wrap="square" lIns="0" tIns="12065" rIns="0" bIns="0" rtlCol="0">
+            <a:spAutoFit/>
+          </a:bodyPr>
+          <a:lstStyle/>
+          <a:p>
+            <a:pPr marL="928369" indent="-916305">
+              <a:lnSpc>
+                <a:spcPts val="5940"/>
+              </a:lnSpc>
+              <a:spcBef>
+                <a:spcPts val="95"/>
+              </a:spcBef>
+              <a:buFont typeface="Microsoft Sans Serif"/>
+              <a:buAutoNum type="arabicPeriod"/>
+              <a:tabLst>
+                <a:tab pos="928369" algn="l"/>
+                <a:tab pos="929005" algn="l"/>
+              </a:tabLst>
+            </a:pPr>
+            <a:r>
+              <a:rPr sz="4950" spc="-180" dirty="0">
+                <a:solidFill>
+                  <a:srgbClr val="929292"/>
+                </a:solidFill>
+                <a:latin typeface="Lucida Sans Unicode"/>
+                <a:cs typeface="Lucida Sans Unicode"/>
+              </a:rPr>
+              <a:t>Отрицание</a:t>
+            </a:r>
+            <a:endParaRPr sz="4950">
+              <a:latin typeface="Lucida Sans Unicode"/>
+              <a:cs typeface="Lucida Sans Unicode"/>
+            </a:endParaRPr>
+          </a:p>
+          <a:p>
+            <a:pPr marL="928369" indent="-916305">
+              <a:lnSpc>
+                <a:spcPts val="5935"/>
+              </a:lnSpc>
+              <a:buFont typeface="Microsoft Sans Serif"/>
+              <a:buAutoNum type="arabicPeriod"/>
+              <a:tabLst>
+                <a:tab pos="928369" algn="l"/>
+                <a:tab pos="929005" algn="l"/>
+              </a:tabLst>
+            </a:pPr>
+            <a:r>
+              <a:rPr sz="4950" spc="-55" dirty="0">
+                <a:solidFill>
+                  <a:srgbClr val="929292"/>
+                </a:solidFill>
+                <a:latin typeface="Lucida Sans Unicode"/>
+                <a:cs typeface="Lucida Sans Unicode"/>
+              </a:rPr>
+              <a:t>Гнев</a:t>
+            </a:r>
+            <a:endParaRPr sz="4950">
+              <a:latin typeface="Lucida Sans Unicode"/>
+              <a:cs typeface="Lucida Sans Unicode"/>
+            </a:endParaRPr>
+          </a:p>
+          <a:p>
+            <a:pPr marL="928369" indent="-916305">
+              <a:lnSpc>
+                <a:spcPts val="5935"/>
+              </a:lnSpc>
+              <a:buFont typeface="Microsoft Sans Serif"/>
+              <a:buAutoNum type="arabicPeriod"/>
+              <a:tabLst>
+                <a:tab pos="928369" algn="l"/>
+                <a:tab pos="929005" algn="l"/>
+              </a:tabLst>
+            </a:pPr>
+            <a:r>
+              <a:rPr sz="4950" spc="-310" dirty="0">
+                <a:solidFill>
+                  <a:srgbClr val="929292"/>
+                </a:solidFill>
+                <a:latin typeface="Lucida Sans Unicode"/>
+                <a:cs typeface="Lucida Sans Unicode"/>
+              </a:rPr>
+              <a:t>Торг</a:t>
+            </a:r>
+            <a:endParaRPr sz="4950">
+              <a:latin typeface="Lucida Sans Unicode"/>
+              <a:cs typeface="Lucida Sans Unicode"/>
+            </a:endParaRPr>
+          </a:p>
+          <a:p>
+            <a:pPr marL="928369" indent="-916305">
+              <a:lnSpc>
+                <a:spcPts val="5935"/>
+              </a:lnSpc>
+              <a:buFont typeface="Microsoft Sans Serif"/>
+              <a:buAutoNum type="arabicPeriod"/>
+              <a:tabLst>
+                <a:tab pos="928369" algn="l"/>
+                <a:tab pos="929005" algn="l"/>
+              </a:tabLst>
+            </a:pPr>
+            <a:r>
+              <a:rPr sz="4950" spc="-130" dirty="0">
+                <a:solidFill>
+                  <a:srgbClr val="929292"/>
+                </a:solidFill>
+                <a:latin typeface="Lucida Sans Unicode"/>
+                <a:cs typeface="Lucida Sans Unicode"/>
+              </a:rPr>
+              <a:t>Депрессия</a:t>
+            </a:r>
+            <a:endParaRPr sz="4950">
+              <a:latin typeface="Lucida Sans Unicode"/>
+              <a:cs typeface="Lucida Sans Unicode"/>
+            </a:endParaRPr>
+          </a:p>
+          <a:p>
+            <a:pPr marL="928369" indent="-916305">
+              <a:lnSpc>
+                <a:spcPts val="5940"/>
+              </a:lnSpc>
+              <a:buFont typeface="Microsoft Sans Serif"/>
+              <a:buAutoNum type="arabicPeriod"/>
+              <a:tabLst>
+                <a:tab pos="928369" algn="l"/>
+                <a:tab pos="929005" algn="l"/>
+              </a:tabLst>
+            </a:pPr>
+            <a:r>
+              <a:rPr sz="4950" spc="-120" dirty="0">
+                <a:solidFill>
+                  <a:srgbClr val="929292"/>
+                </a:solidFill>
+                <a:latin typeface="Lucida Sans Unicode"/>
+                <a:cs typeface="Lucida Sans Unicode"/>
+              </a:rPr>
+              <a:t>Принятие</a:t>
+            </a:r>
+            <a:endParaRPr sz="4950">
+              <a:latin typeface="Lucida Sans Unicode"/>
+              <a:cs typeface="Lucida Sans Unicode"/>
+            </a:endParaRPr>
+          </a:p>
+        </p:txBody>
+      </p:sp>
+    </p:spTree>
+  </p:cSld>
+  <p:clrMapOvr>
+    <a:masterClrMapping/>
+  </p:clrMapOvr>
+</p:sld>
+</file>
+
+<file path=ppt/slides/slide20.xml><?xml version="1.0" encoding="utf-8"?>
 <p:sld xmlns:a="http://schemas.openxmlformats.org/drawingml/2006/main" xmlns:r="http://schemas.openxmlformats.org/officeDocument/2006/relationships" xmlns:p="http://schemas.openxmlformats.org/presentationml/2006/main">
   <p:cSld>
     <p:spTree>
@@ -6061,357 +7688,7 @@
 </p:sld>
 </file>
 
-<file path=ppt/slides/slide2.xml><?xml version="1.0" encoding="utf-8"?>
-<p:sld xmlns:a="http://schemas.openxmlformats.org/drawingml/2006/main" xmlns:r="http://schemas.openxmlformats.org/officeDocument/2006/relationships" xmlns:p="http://schemas.openxmlformats.org/presentationml/2006/main" showMasterSp="0">
-  <p:cSld>
-    <p:spTree>
-      <p:nvGrpSpPr>
-        <p:cNvPr id="1" name=""/>
-        <p:cNvGrpSpPr/>
-        <p:nvPr/>
-      </p:nvGrpSpPr>
-      <p:grpSpPr>
-        <a:xfrm>
-          <a:off x="0" y="0"/>
-          <a:ext cx="0" cy="0"/>
-          <a:chOff x="0" y="0"/>
-          <a:chExt cx="0" cy="0"/>
-        </a:xfrm>
-      </p:grpSpPr>
-      <p:sp>
-        <p:nvSpPr>
-          <p:cNvPr id="2" name="object 2"/>
-          <p:cNvSpPr txBox="1">
-            <a:spLocks noGrp="1"/>
-          </p:cNvSpPr>
-          <p:nvPr>
-            <p:ph type="title"/>
-          </p:nvPr>
-        </p:nvSpPr>
-        <p:spPr>
-          <a:xfrm>
-            <a:off x="3936086" y="821620"/>
-            <a:ext cx="12219940" cy="1081405"/>
-          </a:xfrm>
-          <a:prstGeom prst="rect">
-            <a:avLst/>
-          </a:prstGeom>
-        </p:spPr>
-        <p:txBody>
-          <a:bodyPr vert="horz" wrap="square" lIns="0" tIns="15875" rIns="0" bIns="0" rtlCol="0">
-            <a:spAutoFit/>
-          </a:bodyPr>
-          <a:lstStyle/>
-          <a:p>
-            <a:pPr marL="12700">
-              <a:lnSpc>
-                <a:spcPct val="100000"/>
-              </a:lnSpc>
-              <a:spcBef>
-                <a:spcPts val="125"/>
-              </a:spcBef>
-            </a:pPr>
-            <a:r>
-              <a:rPr spc="-190" dirty="0"/>
-              <a:t>Стади</a:t>
-            </a:r>
-            <a:r>
-              <a:rPr spc="20" dirty="0"/>
-              <a:t>и</a:t>
-            </a:r>
-            <a:r>
-              <a:rPr spc="-800" dirty="0"/>
-              <a:t> </a:t>
-            </a:r>
-            <a:r>
-              <a:rPr spc="-195" dirty="0"/>
-              <a:t>изучени</a:t>
-            </a:r>
-            <a:r>
-              <a:rPr spc="15" dirty="0"/>
-              <a:t>я</a:t>
-            </a:r>
-            <a:r>
-              <a:rPr spc="-795" dirty="0"/>
-              <a:t> </a:t>
-            </a:r>
-            <a:r>
-              <a:rPr spc="-200" dirty="0"/>
-              <a:t>ассемблера</a:t>
-            </a:r>
-          </a:p>
-        </p:txBody>
-      </p:sp>
-      <p:sp>
-        <p:nvSpPr>
-          <p:cNvPr id="3" name="object 3"/>
-          <p:cNvSpPr txBox="1"/>
-          <p:nvPr/>
-        </p:nvSpPr>
-        <p:spPr>
-          <a:xfrm>
-            <a:off x="4440916" y="3690828"/>
-            <a:ext cx="4166235" cy="3207385"/>
-          </a:xfrm>
-          <a:prstGeom prst="rect">
-            <a:avLst/>
-          </a:prstGeom>
-        </p:spPr>
-        <p:txBody>
-          <a:bodyPr vert="horz" wrap="square" lIns="0" tIns="341630" rIns="0" bIns="0" rtlCol="0">
-            <a:spAutoFit/>
-          </a:bodyPr>
-          <a:lstStyle/>
-          <a:p>
-            <a:pPr marL="901065" indent="-889000">
-              <a:lnSpc>
-                <a:spcPct val="100000"/>
-              </a:lnSpc>
-              <a:spcBef>
-                <a:spcPts val="2690"/>
-              </a:spcBef>
-              <a:buFont typeface="Microsoft Sans Serif"/>
-              <a:buAutoNum type="arabicPeriod"/>
-              <a:tabLst>
-                <a:tab pos="901065" algn="l"/>
-                <a:tab pos="901700" algn="l"/>
-              </a:tabLst>
-            </a:pPr>
-            <a:r>
-              <a:rPr sz="4800" spc="-195" dirty="0">
-                <a:latin typeface="Lucida Sans Unicode"/>
-                <a:cs typeface="Lucida Sans Unicode"/>
-              </a:rPr>
-              <a:t>Понимание</a:t>
-            </a:r>
-            <a:endParaRPr sz="4800">
-              <a:latin typeface="Lucida Sans Unicode"/>
-              <a:cs typeface="Lucida Sans Unicode"/>
-            </a:endParaRPr>
-          </a:p>
-          <a:p>
-            <a:pPr marL="901065" indent="-889000">
-              <a:lnSpc>
-                <a:spcPct val="100000"/>
-              </a:lnSpc>
-              <a:spcBef>
-                <a:spcPts val="2590"/>
-              </a:spcBef>
-              <a:buAutoNum type="arabicPeriod"/>
-              <a:tabLst>
-                <a:tab pos="901065" algn="l"/>
-                <a:tab pos="901700" algn="l"/>
-              </a:tabLst>
-            </a:pPr>
-            <a:r>
-              <a:rPr sz="4800" spc="55" dirty="0">
-                <a:latin typeface="Microsoft Sans Serif"/>
-                <a:cs typeface="Microsoft Sans Serif"/>
-              </a:rPr>
-              <a:t>Read-only</a:t>
-            </a:r>
-            <a:endParaRPr sz="4800">
-              <a:latin typeface="Microsoft Sans Serif"/>
-              <a:cs typeface="Microsoft Sans Serif"/>
-            </a:endParaRPr>
-          </a:p>
-          <a:p>
-            <a:pPr marL="901065" indent="-889000">
-              <a:lnSpc>
-                <a:spcPct val="100000"/>
-              </a:lnSpc>
-              <a:spcBef>
-                <a:spcPts val="2590"/>
-              </a:spcBef>
-              <a:buAutoNum type="arabicPeriod"/>
-              <a:tabLst>
-                <a:tab pos="901065" algn="l"/>
-                <a:tab pos="901700" algn="l"/>
-              </a:tabLst>
-            </a:pPr>
-            <a:r>
-              <a:rPr sz="4800" spc="80" dirty="0">
-                <a:latin typeface="Microsoft Sans Serif"/>
-                <a:cs typeface="Microsoft Sans Serif"/>
-              </a:rPr>
-              <a:t>Read-write</a:t>
-            </a:r>
-            <a:endParaRPr sz="4800">
-              <a:latin typeface="Microsoft Sans Serif"/>
-              <a:cs typeface="Microsoft Sans Serif"/>
-            </a:endParaRPr>
-          </a:p>
-        </p:txBody>
-      </p:sp>
-      <p:sp>
-        <p:nvSpPr>
-          <p:cNvPr id="4" name="object 4"/>
-          <p:cNvSpPr txBox="1"/>
-          <p:nvPr/>
-        </p:nvSpPr>
-        <p:spPr>
-          <a:xfrm>
-            <a:off x="12251680" y="3737983"/>
-            <a:ext cx="4234180" cy="3795395"/>
-          </a:xfrm>
-          <a:prstGeom prst="rect">
-            <a:avLst/>
-          </a:prstGeom>
-        </p:spPr>
-        <p:txBody>
-          <a:bodyPr vert="horz" wrap="square" lIns="0" tIns="12065" rIns="0" bIns="0" rtlCol="0">
-            <a:spAutoFit/>
-          </a:bodyPr>
-          <a:lstStyle/>
-          <a:p>
-            <a:pPr marL="928369" indent="-916305">
-              <a:lnSpc>
-                <a:spcPts val="5940"/>
-              </a:lnSpc>
-              <a:spcBef>
-                <a:spcPts val="95"/>
-              </a:spcBef>
-              <a:buFont typeface="Microsoft Sans Serif"/>
-              <a:buAutoNum type="arabicPeriod"/>
-              <a:tabLst>
-                <a:tab pos="928369" algn="l"/>
-                <a:tab pos="929005" algn="l"/>
-              </a:tabLst>
-            </a:pPr>
-            <a:r>
-              <a:rPr sz="4950" spc="-180" dirty="0">
-                <a:solidFill>
-                  <a:srgbClr val="929292"/>
-                </a:solidFill>
-                <a:latin typeface="Lucida Sans Unicode"/>
-                <a:cs typeface="Lucida Sans Unicode"/>
-              </a:rPr>
-              <a:t>Отрицание</a:t>
-            </a:r>
-            <a:endParaRPr sz="4950">
-              <a:latin typeface="Lucida Sans Unicode"/>
-              <a:cs typeface="Lucida Sans Unicode"/>
-            </a:endParaRPr>
-          </a:p>
-          <a:p>
-            <a:pPr marL="928369" indent="-916305">
-              <a:lnSpc>
-                <a:spcPts val="5935"/>
-              </a:lnSpc>
-              <a:buFont typeface="Microsoft Sans Serif"/>
-              <a:buAutoNum type="arabicPeriod"/>
-              <a:tabLst>
-                <a:tab pos="928369" algn="l"/>
-                <a:tab pos="929005" algn="l"/>
-              </a:tabLst>
-            </a:pPr>
-            <a:r>
-              <a:rPr sz="4950" spc="-55" dirty="0">
-                <a:solidFill>
-                  <a:srgbClr val="929292"/>
-                </a:solidFill>
-                <a:latin typeface="Lucida Sans Unicode"/>
-                <a:cs typeface="Lucida Sans Unicode"/>
-              </a:rPr>
-              <a:t>Гнев</a:t>
-            </a:r>
-            <a:endParaRPr sz="4950">
-              <a:latin typeface="Lucida Sans Unicode"/>
-              <a:cs typeface="Lucida Sans Unicode"/>
-            </a:endParaRPr>
-          </a:p>
-          <a:p>
-            <a:pPr marL="928369" indent="-916305">
-              <a:lnSpc>
-                <a:spcPts val="5935"/>
-              </a:lnSpc>
-              <a:buFont typeface="Microsoft Sans Serif"/>
-              <a:buAutoNum type="arabicPeriod"/>
-              <a:tabLst>
-                <a:tab pos="928369" algn="l"/>
-                <a:tab pos="929005" algn="l"/>
-              </a:tabLst>
-            </a:pPr>
-            <a:r>
-              <a:rPr sz="4950" spc="-310" dirty="0">
-                <a:solidFill>
-                  <a:srgbClr val="929292"/>
-                </a:solidFill>
-                <a:latin typeface="Lucida Sans Unicode"/>
-                <a:cs typeface="Lucida Sans Unicode"/>
-              </a:rPr>
-              <a:t>Торг</a:t>
-            </a:r>
-            <a:endParaRPr sz="4950">
-              <a:latin typeface="Lucida Sans Unicode"/>
-              <a:cs typeface="Lucida Sans Unicode"/>
-            </a:endParaRPr>
-          </a:p>
-          <a:p>
-            <a:pPr marL="928369" indent="-916305">
-              <a:lnSpc>
-                <a:spcPts val="5935"/>
-              </a:lnSpc>
-              <a:buFont typeface="Microsoft Sans Serif"/>
-              <a:buAutoNum type="arabicPeriod"/>
-              <a:tabLst>
-                <a:tab pos="928369" algn="l"/>
-                <a:tab pos="929005" algn="l"/>
-              </a:tabLst>
-            </a:pPr>
-            <a:r>
-              <a:rPr sz="4950" spc="-130" dirty="0">
-                <a:solidFill>
-                  <a:srgbClr val="929292"/>
-                </a:solidFill>
-                <a:latin typeface="Lucida Sans Unicode"/>
-                <a:cs typeface="Lucida Sans Unicode"/>
-              </a:rPr>
-              <a:t>Депрессия</a:t>
-            </a:r>
-            <a:endParaRPr sz="4950">
-              <a:latin typeface="Lucida Sans Unicode"/>
-              <a:cs typeface="Lucida Sans Unicode"/>
-            </a:endParaRPr>
-          </a:p>
-          <a:p>
-            <a:pPr marL="928369" indent="-916305">
-              <a:lnSpc>
-                <a:spcPts val="5940"/>
-              </a:lnSpc>
-              <a:buFont typeface="Microsoft Sans Serif"/>
-              <a:buAutoNum type="arabicPeriod"/>
-              <a:tabLst>
-                <a:tab pos="928369" algn="l"/>
-                <a:tab pos="929005" algn="l"/>
-              </a:tabLst>
-            </a:pPr>
-            <a:r>
-              <a:rPr sz="4950" spc="-120" dirty="0">
-                <a:solidFill>
-                  <a:srgbClr val="929292"/>
-                </a:solidFill>
-                <a:latin typeface="Lucida Sans Unicode"/>
-                <a:cs typeface="Lucida Sans Unicode"/>
-              </a:rPr>
-              <a:t>Принятие</a:t>
-            </a:r>
-            <a:endParaRPr sz="4950">
-              <a:latin typeface="Lucida Sans Unicode"/>
-              <a:cs typeface="Lucida Sans Unicode"/>
-            </a:endParaRPr>
-          </a:p>
-        </p:txBody>
-      </p:sp>
-    </p:spTree>
-  </p:cSld>
-  <p:clrMapOvr>
-    <a:masterClrMapping/>
-  </p:clrMapOvr>
-</p:sld>
-</file>
-
-<file path=ppt/slides/slide20.xml><?xml version="1.0" encoding="utf-8"?>
+<file path=ppt/slides/slide21.xml><?xml version="1.0" encoding="utf-8"?>
 <p:sld xmlns:a="http://schemas.openxmlformats.org/drawingml/2006/main" xmlns:r="http://schemas.openxmlformats.org/officeDocument/2006/relationships" xmlns:p="http://schemas.openxmlformats.org/presentationml/2006/main">
   <p:cSld>
     <p:spTree>
@@ -6556,7 +7833,7 @@
 </p:sld>
 </file>
 
-<file path=ppt/slides/slide21.xml><?xml version="1.0" encoding="utf-8"?>
+<file path=ppt/slides/slide22.xml><?xml version="1.0" encoding="utf-8"?>
 <p:sld xmlns:a="http://schemas.openxmlformats.org/drawingml/2006/main" xmlns:r="http://schemas.openxmlformats.org/officeDocument/2006/relationships" xmlns:p="http://schemas.openxmlformats.org/presentationml/2006/main">
   <p:cSld>
     <p:spTree>
@@ -6700,7 +7977,7 @@
 </p:sld>
 </file>
 
-<file path=ppt/slides/slide22.xml><?xml version="1.0" encoding="utf-8"?>
+<file path=ppt/slides/slide23.xml><?xml version="1.0" encoding="utf-8"?>
 <p:sld xmlns:a="http://schemas.openxmlformats.org/drawingml/2006/main" xmlns:r="http://schemas.openxmlformats.org/officeDocument/2006/relationships" xmlns:p="http://schemas.openxmlformats.org/presentationml/2006/main">
   <p:cSld>
     <p:spTree>
@@ -6819,7 +8096,7 @@
 </p:sld>
 </file>
 
-<file path=ppt/slides/slide23.xml><?xml version="1.0" encoding="utf-8"?>
+<file path=ppt/slides/slide24.xml><?xml version="1.0" encoding="utf-8"?>
 <p:sld xmlns:a="http://schemas.openxmlformats.org/drawingml/2006/main" xmlns:r="http://schemas.openxmlformats.org/officeDocument/2006/relationships" xmlns:p="http://schemas.openxmlformats.org/presentationml/2006/main">
   <p:cSld>
     <p:spTree>
@@ -6934,7 +8211,7 @@
 </p:sld>
 </file>
 
-<file path=ppt/slides/slide24.xml><?xml version="1.0" encoding="utf-8"?>
+<file path=ppt/slides/slide25.xml><?xml version="1.0" encoding="utf-8"?>
 <p:sld xmlns:a="http://schemas.openxmlformats.org/drawingml/2006/main" xmlns:r="http://schemas.openxmlformats.org/officeDocument/2006/relationships" xmlns:p="http://schemas.openxmlformats.org/presentationml/2006/main">
   <p:cSld>
     <p:spTree>
@@ -7053,7 +8330,7 @@
 </p:sld>
 </file>
 
-<file path=ppt/slides/slide25.xml><?xml version="1.0" encoding="utf-8"?>
+<file path=ppt/slides/slide26.xml><?xml version="1.0" encoding="utf-8"?>
 <p:sld xmlns:a="http://schemas.openxmlformats.org/drawingml/2006/main" xmlns:r="http://schemas.openxmlformats.org/officeDocument/2006/relationships" xmlns:p="http://schemas.openxmlformats.org/presentationml/2006/main">
   <p:cSld>
     <p:spTree>
@@ -7424,7 +8701,7 @@
 </p:sld>
 </file>
 
-<file path=ppt/slides/slide26.xml><?xml version="1.0" encoding="utf-8"?>
+<file path=ppt/slides/slide27.xml><?xml version="1.0" encoding="utf-8"?>
 <p:sld xmlns:a="http://schemas.openxmlformats.org/drawingml/2006/main" xmlns:r="http://schemas.openxmlformats.org/officeDocument/2006/relationships" xmlns:p="http://schemas.openxmlformats.org/presentationml/2006/main">
   <p:cSld>
     <p:spTree>
@@ -7538,7 +8815,7 @@
 </p:sld>
 </file>
 
-<file path=ppt/slides/slide27.xml><?xml version="1.0" encoding="utf-8"?>
+<file path=ppt/slides/slide28.xml><?xml version="1.0" encoding="utf-8"?>
 <p:sld xmlns:a="http://schemas.openxmlformats.org/drawingml/2006/main" xmlns:r="http://schemas.openxmlformats.org/officeDocument/2006/relationships" xmlns:p="http://schemas.openxmlformats.org/presentationml/2006/main">
   <p:cSld>
     <p:spTree>
@@ -7658,7 +8935,7 @@
 </p:sld>
 </file>
 
-<file path=ppt/slides/slide28.xml><?xml version="1.0" encoding="utf-8"?>
+<file path=ppt/slides/slide29.xml><?xml version="1.0" encoding="utf-8"?>
 <p:sld xmlns:a="http://schemas.openxmlformats.org/drawingml/2006/main" xmlns:r="http://schemas.openxmlformats.org/officeDocument/2006/relationships" xmlns:p="http://schemas.openxmlformats.org/presentationml/2006/main">
   <p:cSld>
     <p:spTree>
@@ -7772,125 +9049,6 @@
     <p:extLst>
       <p:ext uri="{BB962C8B-B14F-4D97-AF65-F5344CB8AC3E}">
         <p14:creationId xmlns:p14="http://schemas.microsoft.com/office/powerpoint/2010/main" val="2304031776"/>
-      </p:ext>
-    </p:extLst>
-  </p:cSld>
-  <p:clrMapOvr>
-    <a:masterClrMapping/>
-  </p:clrMapOvr>
-</p:sld>
-</file>
-
-<file path=ppt/slides/slide29.xml><?xml version="1.0" encoding="utf-8"?>
-<p:sld xmlns:a="http://schemas.openxmlformats.org/drawingml/2006/main" xmlns:r="http://schemas.openxmlformats.org/officeDocument/2006/relationships" xmlns:p="http://schemas.openxmlformats.org/presentationml/2006/main">
-  <p:cSld>
-    <p:spTree>
-      <p:nvGrpSpPr>
-        <p:cNvPr id="1" name=""/>
-        <p:cNvGrpSpPr/>
-        <p:nvPr/>
-      </p:nvGrpSpPr>
-      <p:grpSpPr>
-        <a:xfrm>
-          <a:off x="0" y="0"/>
-          <a:ext cx="0" cy="0"/>
-          <a:chOff x="0" y="0"/>
-          <a:chExt cx="0" cy="0"/>
-        </a:xfrm>
-      </p:grpSpPr>
-      <p:sp>
-        <p:nvSpPr>
-          <p:cNvPr id="2" name="Title 1">
-            <a:extLst>
-              <a:ext uri="{FF2B5EF4-FFF2-40B4-BE49-F238E27FC236}">
-                <a16:creationId xmlns:a16="http://schemas.microsoft.com/office/drawing/2014/main" id="{0150AF53-68B7-4B7D-B01F-B7D3DEBDFCD1}"/>
-              </a:ext>
-            </a:extLst>
-          </p:cNvPr>
-          <p:cNvSpPr>
-            <a:spLocks noGrp="1"/>
-          </p:cNvSpPr>
-          <p:nvPr>
-            <p:ph type="title"/>
-          </p:nvPr>
-        </p:nvSpPr>
-        <p:spPr>
-          <a:xfrm>
-            <a:off x="6533655" y="821620"/>
-            <a:ext cx="9080995" cy="1061829"/>
-          </a:xfrm>
-        </p:spPr>
-        <p:txBody>
-          <a:bodyPr/>
-          <a:lstStyle/>
-          <a:p>
-            <a:r>
-              <a:rPr lang="en-US" dirty="0"/>
-              <a:t>Reservation stations</a:t>
-            </a:r>
-            <a:endParaRPr lang="ru-RU" dirty="0"/>
-          </a:p>
-        </p:txBody>
-      </p:sp>
-      <p:sp>
-        <p:nvSpPr>
-          <p:cNvPr id="3" name="Text Placeholder 2">
-            <a:extLst>
-              <a:ext uri="{FF2B5EF4-FFF2-40B4-BE49-F238E27FC236}">
-                <a16:creationId xmlns:a16="http://schemas.microsoft.com/office/drawing/2014/main" id="{129102F5-19B8-43BA-BFD1-8A1A44171611}"/>
-              </a:ext>
-            </a:extLst>
-          </p:cNvPr>
-          <p:cNvSpPr>
-            <a:spLocks noGrp="1"/>
-          </p:cNvSpPr>
-          <p:nvPr>
-            <p:ph type="body" idx="1"/>
-          </p:nvPr>
-        </p:nvSpPr>
-        <p:spPr/>
-        <p:txBody>
-          <a:bodyPr/>
-          <a:lstStyle/>
-          <a:p>
-            <a:endParaRPr lang="ru-RU" dirty="0"/>
-          </a:p>
-        </p:txBody>
-      </p:sp>
-      <p:pic>
-        <p:nvPicPr>
-          <p:cNvPr id="5" name="Picture 4">
-            <a:extLst>
-              <a:ext uri="{FF2B5EF4-FFF2-40B4-BE49-F238E27FC236}">
-                <a16:creationId xmlns:a16="http://schemas.microsoft.com/office/drawing/2014/main" id="{4ACF243F-6267-4B51-A05C-C7165DF8F18E}"/>
-              </a:ext>
-            </a:extLst>
-          </p:cNvPr>
-          <p:cNvPicPr>
-            <a:picLocks noChangeAspect="1"/>
-          </p:cNvPicPr>
-          <p:nvPr/>
-        </p:nvPicPr>
-        <p:blipFill>
-          <a:blip r:embed="rId2"/>
-          <a:stretch>
-            <a:fillRect/>
-          </a:stretch>
-        </p:blipFill>
-        <p:spPr>
-          <a:xfrm>
-            <a:off x="5739880" y="2835275"/>
-            <a:ext cx="8624340" cy="7900533"/>
-          </a:xfrm>
-          <a:prstGeom prst="rect">
-            <a:avLst/>
-          </a:prstGeom>
-        </p:spPr>
-      </p:pic>
-    </p:spTree>
-    <p:extLst>
-      <p:ext uri="{BB962C8B-B14F-4D97-AF65-F5344CB8AC3E}">
-        <p14:creationId xmlns:p14="http://schemas.microsoft.com/office/powerpoint/2010/main" val="4136644773"/>
       </p:ext>
     </p:extLst>
   </p:cSld>
@@ -8089,10 +9247,10 @@
       </p:sp>
       <p:pic>
         <p:nvPicPr>
-          <p:cNvPr id="6" name="Picture 5">
+          <p:cNvPr id="5" name="Picture 4">
             <a:extLst>
               <a:ext uri="{FF2B5EF4-FFF2-40B4-BE49-F238E27FC236}">
-                <a16:creationId xmlns:a16="http://schemas.microsoft.com/office/drawing/2014/main" id="{FA51CF44-0764-4F2A-8D59-9BE540198D65}"/>
+                <a16:creationId xmlns:a16="http://schemas.microsoft.com/office/drawing/2014/main" id="{4ACF243F-6267-4B51-A05C-C7165DF8F18E}"/>
               </a:ext>
             </a:extLst>
           </p:cNvPr>
@@ -8109,8 +9267,8 @@
         </p:blipFill>
         <p:spPr>
           <a:xfrm>
-            <a:off x="5963265" y="3063875"/>
-            <a:ext cx="8177570" cy="7658542"/>
+            <a:off x="5739880" y="2835275"/>
+            <a:ext cx="8624340" cy="7900533"/>
           </a:xfrm>
           <a:prstGeom prst="rect">
             <a:avLst/>
@@ -8120,7 +9278,7 @@
     </p:spTree>
     <p:extLst>
       <p:ext uri="{BB962C8B-B14F-4D97-AF65-F5344CB8AC3E}">
-        <p14:creationId xmlns:p14="http://schemas.microsoft.com/office/powerpoint/2010/main" val="2301093104"/>
+        <p14:creationId xmlns:p14="http://schemas.microsoft.com/office/powerpoint/2010/main" val="4136644773"/>
       </p:ext>
     </p:extLst>
   </p:cSld>
@@ -8208,6 +9366,125 @@
       </p:sp>
       <p:pic>
         <p:nvPicPr>
+          <p:cNvPr id="6" name="Picture 5">
+            <a:extLst>
+              <a:ext uri="{FF2B5EF4-FFF2-40B4-BE49-F238E27FC236}">
+                <a16:creationId xmlns:a16="http://schemas.microsoft.com/office/drawing/2014/main" id="{FA51CF44-0764-4F2A-8D59-9BE540198D65}"/>
+              </a:ext>
+            </a:extLst>
+          </p:cNvPr>
+          <p:cNvPicPr>
+            <a:picLocks noChangeAspect="1"/>
+          </p:cNvPicPr>
+          <p:nvPr/>
+        </p:nvPicPr>
+        <p:blipFill>
+          <a:blip r:embed="rId2"/>
+          <a:stretch>
+            <a:fillRect/>
+          </a:stretch>
+        </p:blipFill>
+        <p:spPr>
+          <a:xfrm>
+            <a:off x="5963265" y="3063875"/>
+            <a:ext cx="8177570" cy="7658542"/>
+          </a:xfrm>
+          <a:prstGeom prst="rect">
+            <a:avLst/>
+          </a:prstGeom>
+        </p:spPr>
+      </p:pic>
+    </p:spTree>
+    <p:extLst>
+      <p:ext uri="{BB962C8B-B14F-4D97-AF65-F5344CB8AC3E}">
+        <p14:creationId xmlns:p14="http://schemas.microsoft.com/office/powerpoint/2010/main" val="2301093104"/>
+      </p:ext>
+    </p:extLst>
+  </p:cSld>
+  <p:clrMapOvr>
+    <a:masterClrMapping/>
+  </p:clrMapOvr>
+</p:sld>
+</file>
+
+<file path=ppt/slides/slide32.xml><?xml version="1.0" encoding="utf-8"?>
+<p:sld xmlns:a="http://schemas.openxmlformats.org/drawingml/2006/main" xmlns:r="http://schemas.openxmlformats.org/officeDocument/2006/relationships" xmlns:p="http://schemas.openxmlformats.org/presentationml/2006/main">
+  <p:cSld>
+    <p:spTree>
+      <p:nvGrpSpPr>
+        <p:cNvPr id="1" name=""/>
+        <p:cNvGrpSpPr/>
+        <p:nvPr/>
+      </p:nvGrpSpPr>
+      <p:grpSpPr>
+        <a:xfrm>
+          <a:off x="0" y="0"/>
+          <a:ext cx="0" cy="0"/>
+          <a:chOff x="0" y="0"/>
+          <a:chExt cx="0" cy="0"/>
+        </a:xfrm>
+      </p:grpSpPr>
+      <p:sp>
+        <p:nvSpPr>
+          <p:cNvPr id="2" name="Title 1">
+            <a:extLst>
+              <a:ext uri="{FF2B5EF4-FFF2-40B4-BE49-F238E27FC236}">
+                <a16:creationId xmlns:a16="http://schemas.microsoft.com/office/drawing/2014/main" id="{0150AF53-68B7-4B7D-B01F-B7D3DEBDFCD1}"/>
+              </a:ext>
+            </a:extLst>
+          </p:cNvPr>
+          <p:cNvSpPr>
+            <a:spLocks noGrp="1"/>
+          </p:cNvSpPr>
+          <p:nvPr>
+            <p:ph type="title"/>
+          </p:nvPr>
+        </p:nvSpPr>
+        <p:spPr>
+          <a:xfrm>
+            <a:off x="6533655" y="821620"/>
+            <a:ext cx="9080995" cy="1061829"/>
+          </a:xfrm>
+        </p:spPr>
+        <p:txBody>
+          <a:bodyPr/>
+          <a:lstStyle/>
+          <a:p>
+            <a:r>
+              <a:rPr lang="en-US" dirty="0"/>
+              <a:t>Reservation stations</a:t>
+            </a:r>
+            <a:endParaRPr lang="ru-RU" dirty="0"/>
+          </a:p>
+        </p:txBody>
+      </p:sp>
+      <p:sp>
+        <p:nvSpPr>
+          <p:cNvPr id="3" name="Text Placeholder 2">
+            <a:extLst>
+              <a:ext uri="{FF2B5EF4-FFF2-40B4-BE49-F238E27FC236}">
+                <a16:creationId xmlns:a16="http://schemas.microsoft.com/office/drawing/2014/main" id="{129102F5-19B8-43BA-BFD1-8A1A44171611}"/>
+              </a:ext>
+            </a:extLst>
+          </p:cNvPr>
+          <p:cNvSpPr>
+            <a:spLocks noGrp="1"/>
+          </p:cNvSpPr>
+          <p:nvPr>
+            <p:ph type="body" idx="1"/>
+          </p:nvPr>
+        </p:nvSpPr>
+        <p:spPr/>
+        <p:txBody>
+          <a:bodyPr/>
+          <a:lstStyle/>
+          <a:p>
+            <a:endParaRPr lang="ru-RU" dirty="0"/>
+          </a:p>
+        </p:txBody>
+      </p:sp>
+      <p:pic>
+        <p:nvPicPr>
           <p:cNvPr id="8" name="Picture 7">
             <a:extLst>
               <a:ext uri="{FF2B5EF4-FFF2-40B4-BE49-F238E27FC236}">
@@ -8240,125 +9517,6 @@
     <p:extLst>
       <p:ext uri="{BB962C8B-B14F-4D97-AF65-F5344CB8AC3E}">
         <p14:creationId xmlns:p14="http://schemas.microsoft.com/office/powerpoint/2010/main" val="2906359719"/>
-      </p:ext>
-    </p:extLst>
-  </p:cSld>
-  <p:clrMapOvr>
-    <a:masterClrMapping/>
-  </p:clrMapOvr>
-</p:sld>
-</file>
-
-<file path=ppt/slides/slide32.xml><?xml version="1.0" encoding="utf-8"?>
-<p:sld xmlns:a="http://schemas.openxmlformats.org/drawingml/2006/main" xmlns:r="http://schemas.openxmlformats.org/officeDocument/2006/relationships" xmlns:p="http://schemas.openxmlformats.org/presentationml/2006/main">
-  <p:cSld>
-    <p:spTree>
-      <p:nvGrpSpPr>
-        <p:cNvPr id="1" name=""/>
-        <p:cNvGrpSpPr/>
-        <p:nvPr/>
-      </p:nvGrpSpPr>
-      <p:grpSpPr>
-        <a:xfrm>
-          <a:off x="0" y="0"/>
-          <a:ext cx="0" cy="0"/>
-          <a:chOff x="0" y="0"/>
-          <a:chExt cx="0" cy="0"/>
-        </a:xfrm>
-      </p:grpSpPr>
-      <p:sp>
-        <p:nvSpPr>
-          <p:cNvPr id="2" name="Title 1">
-            <a:extLst>
-              <a:ext uri="{FF2B5EF4-FFF2-40B4-BE49-F238E27FC236}">
-                <a16:creationId xmlns:a16="http://schemas.microsoft.com/office/drawing/2014/main" id="{6B431772-3E73-4D70-BFA5-12224ACFB2EB}"/>
-              </a:ext>
-            </a:extLst>
-          </p:cNvPr>
-          <p:cNvSpPr>
-            <a:spLocks noGrp="1"/>
-          </p:cNvSpPr>
-          <p:nvPr>
-            <p:ph type="title"/>
-          </p:nvPr>
-        </p:nvSpPr>
-        <p:spPr>
-          <a:xfrm>
-            <a:off x="6083051" y="854075"/>
-            <a:ext cx="7937995" cy="1081405"/>
-          </a:xfrm>
-        </p:spPr>
-        <p:txBody>
-          <a:bodyPr/>
-          <a:lstStyle/>
-          <a:p>
-            <a:r>
-              <a:rPr lang="en-US" dirty="0"/>
-              <a:t>Common Data Bus </a:t>
-            </a:r>
-            <a:endParaRPr lang="ru-RU" dirty="0"/>
-          </a:p>
-        </p:txBody>
-      </p:sp>
-      <p:sp>
-        <p:nvSpPr>
-          <p:cNvPr id="3" name="Text Placeholder 2">
-            <a:extLst>
-              <a:ext uri="{FF2B5EF4-FFF2-40B4-BE49-F238E27FC236}">
-                <a16:creationId xmlns:a16="http://schemas.microsoft.com/office/drawing/2014/main" id="{212F266F-AEAE-4B3D-96BC-942FBBF257BC}"/>
-              </a:ext>
-            </a:extLst>
-          </p:cNvPr>
-          <p:cNvSpPr>
-            <a:spLocks noGrp="1"/>
-          </p:cNvSpPr>
-          <p:nvPr>
-            <p:ph type="body" idx="1"/>
-          </p:nvPr>
-        </p:nvSpPr>
-        <p:spPr/>
-        <p:txBody>
-          <a:bodyPr/>
-          <a:lstStyle/>
-          <a:p>
-            <a:endParaRPr lang="ru-RU"/>
-          </a:p>
-        </p:txBody>
-      </p:sp>
-      <p:pic>
-        <p:nvPicPr>
-          <p:cNvPr id="5" name="Picture 4">
-            <a:extLst>
-              <a:ext uri="{FF2B5EF4-FFF2-40B4-BE49-F238E27FC236}">
-                <a16:creationId xmlns:a16="http://schemas.microsoft.com/office/drawing/2014/main" id="{228187F6-F737-4CA5-B49A-DC217866661C}"/>
-              </a:ext>
-            </a:extLst>
-          </p:cNvPr>
-          <p:cNvPicPr>
-            <a:picLocks noChangeAspect="1"/>
-          </p:cNvPicPr>
-          <p:nvPr/>
-        </p:nvPicPr>
-        <p:blipFill>
-          <a:blip r:embed="rId2"/>
-          <a:stretch>
-            <a:fillRect/>
-          </a:stretch>
-        </p:blipFill>
-        <p:spPr>
-          <a:xfrm>
-            <a:off x="6260885" y="3140075"/>
-            <a:ext cx="7582330" cy="7582330"/>
-          </a:xfrm>
-          <a:prstGeom prst="rect">
-            <a:avLst/>
-          </a:prstGeom>
-        </p:spPr>
-      </p:pic>
-    </p:spTree>
-    <p:extLst>
-      <p:ext uri="{BB962C8B-B14F-4D97-AF65-F5344CB8AC3E}">
-        <p14:creationId xmlns:p14="http://schemas.microsoft.com/office/powerpoint/2010/main" val="1800569138"/>
       </p:ext>
     </p:extLst>
   </p:cSld>
@@ -8446,6 +9604,125 @@
       </p:sp>
       <p:pic>
         <p:nvPicPr>
+          <p:cNvPr id="5" name="Picture 4">
+            <a:extLst>
+              <a:ext uri="{FF2B5EF4-FFF2-40B4-BE49-F238E27FC236}">
+                <a16:creationId xmlns:a16="http://schemas.microsoft.com/office/drawing/2014/main" id="{228187F6-F737-4CA5-B49A-DC217866661C}"/>
+              </a:ext>
+            </a:extLst>
+          </p:cNvPr>
+          <p:cNvPicPr>
+            <a:picLocks noChangeAspect="1"/>
+          </p:cNvPicPr>
+          <p:nvPr/>
+        </p:nvPicPr>
+        <p:blipFill>
+          <a:blip r:embed="rId2"/>
+          <a:stretch>
+            <a:fillRect/>
+          </a:stretch>
+        </p:blipFill>
+        <p:spPr>
+          <a:xfrm>
+            <a:off x="6260885" y="3140075"/>
+            <a:ext cx="7582330" cy="7582330"/>
+          </a:xfrm>
+          <a:prstGeom prst="rect">
+            <a:avLst/>
+          </a:prstGeom>
+        </p:spPr>
+      </p:pic>
+    </p:spTree>
+    <p:extLst>
+      <p:ext uri="{BB962C8B-B14F-4D97-AF65-F5344CB8AC3E}">
+        <p14:creationId xmlns:p14="http://schemas.microsoft.com/office/powerpoint/2010/main" val="1800569138"/>
+      </p:ext>
+    </p:extLst>
+  </p:cSld>
+  <p:clrMapOvr>
+    <a:masterClrMapping/>
+  </p:clrMapOvr>
+</p:sld>
+</file>
+
+<file path=ppt/slides/slide34.xml><?xml version="1.0" encoding="utf-8"?>
+<p:sld xmlns:a="http://schemas.openxmlformats.org/drawingml/2006/main" xmlns:r="http://schemas.openxmlformats.org/officeDocument/2006/relationships" xmlns:p="http://schemas.openxmlformats.org/presentationml/2006/main">
+  <p:cSld>
+    <p:spTree>
+      <p:nvGrpSpPr>
+        <p:cNvPr id="1" name=""/>
+        <p:cNvGrpSpPr/>
+        <p:nvPr/>
+      </p:nvGrpSpPr>
+      <p:grpSpPr>
+        <a:xfrm>
+          <a:off x="0" y="0"/>
+          <a:ext cx="0" cy="0"/>
+          <a:chOff x="0" y="0"/>
+          <a:chExt cx="0" cy="0"/>
+        </a:xfrm>
+      </p:grpSpPr>
+      <p:sp>
+        <p:nvSpPr>
+          <p:cNvPr id="2" name="Title 1">
+            <a:extLst>
+              <a:ext uri="{FF2B5EF4-FFF2-40B4-BE49-F238E27FC236}">
+                <a16:creationId xmlns:a16="http://schemas.microsoft.com/office/drawing/2014/main" id="{6B431772-3E73-4D70-BFA5-12224ACFB2EB}"/>
+              </a:ext>
+            </a:extLst>
+          </p:cNvPr>
+          <p:cNvSpPr>
+            <a:spLocks noGrp="1"/>
+          </p:cNvSpPr>
+          <p:nvPr>
+            <p:ph type="title"/>
+          </p:nvPr>
+        </p:nvSpPr>
+        <p:spPr>
+          <a:xfrm>
+            <a:off x="6083051" y="854075"/>
+            <a:ext cx="7937995" cy="1081405"/>
+          </a:xfrm>
+        </p:spPr>
+        <p:txBody>
+          <a:bodyPr/>
+          <a:lstStyle/>
+          <a:p>
+            <a:r>
+              <a:rPr lang="en-US" dirty="0"/>
+              <a:t>Common Data Bus </a:t>
+            </a:r>
+            <a:endParaRPr lang="ru-RU" dirty="0"/>
+          </a:p>
+        </p:txBody>
+      </p:sp>
+      <p:sp>
+        <p:nvSpPr>
+          <p:cNvPr id="3" name="Text Placeholder 2">
+            <a:extLst>
+              <a:ext uri="{FF2B5EF4-FFF2-40B4-BE49-F238E27FC236}">
+                <a16:creationId xmlns:a16="http://schemas.microsoft.com/office/drawing/2014/main" id="{212F266F-AEAE-4B3D-96BC-942FBBF257BC}"/>
+              </a:ext>
+            </a:extLst>
+          </p:cNvPr>
+          <p:cNvSpPr>
+            <a:spLocks noGrp="1"/>
+          </p:cNvSpPr>
+          <p:nvPr>
+            <p:ph type="body" idx="1"/>
+          </p:nvPr>
+        </p:nvSpPr>
+        <p:spPr/>
+        <p:txBody>
+          <a:bodyPr/>
+          <a:lstStyle/>
+          <a:p>
+            <a:endParaRPr lang="ru-RU"/>
+          </a:p>
+        </p:txBody>
+      </p:sp>
+      <p:pic>
+        <p:nvPicPr>
           <p:cNvPr id="6" name="Picture 5">
             <a:extLst>
               <a:ext uri="{FF2B5EF4-FFF2-40B4-BE49-F238E27FC236}">
@@ -8478,125 +9755,6 @@
     <p:extLst>
       <p:ext uri="{BB962C8B-B14F-4D97-AF65-F5344CB8AC3E}">
         <p14:creationId xmlns:p14="http://schemas.microsoft.com/office/powerpoint/2010/main" val="1859932738"/>
-      </p:ext>
-    </p:extLst>
-  </p:cSld>
-  <p:clrMapOvr>
-    <a:masterClrMapping/>
-  </p:clrMapOvr>
-</p:sld>
-</file>
-
-<file path=ppt/slides/slide34.xml><?xml version="1.0" encoding="utf-8"?>
-<p:sld xmlns:a="http://schemas.openxmlformats.org/drawingml/2006/main" xmlns:r="http://schemas.openxmlformats.org/officeDocument/2006/relationships" xmlns:p="http://schemas.openxmlformats.org/presentationml/2006/main">
-  <p:cSld>
-    <p:spTree>
-      <p:nvGrpSpPr>
-        <p:cNvPr id="1" name=""/>
-        <p:cNvGrpSpPr/>
-        <p:nvPr/>
-      </p:nvGrpSpPr>
-      <p:grpSpPr>
-        <a:xfrm>
-          <a:off x="0" y="0"/>
-          <a:ext cx="0" cy="0"/>
-          <a:chOff x="0" y="0"/>
-          <a:chExt cx="0" cy="0"/>
-        </a:xfrm>
-      </p:grpSpPr>
-      <p:sp>
-        <p:nvSpPr>
-          <p:cNvPr id="2" name="Title 1">
-            <a:extLst>
-              <a:ext uri="{FF2B5EF4-FFF2-40B4-BE49-F238E27FC236}">
-                <a16:creationId xmlns:a16="http://schemas.microsoft.com/office/drawing/2014/main" id="{E223092B-A683-4585-8FD5-9541B3FD6927}"/>
-              </a:ext>
-            </a:extLst>
-          </p:cNvPr>
-          <p:cNvSpPr>
-            <a:spLocks noGrp="1"/>
-          </p:cNvSpPr>
-          <p:nvPr>
-            <p:ph type="title"/>
-          </p:nvPr>
-        </p:nvSpPr>
-        <p:spPr>
-          <a:xfrm>
-            <a:off x="8788151" y="854075"/>
-            <a:ext cx="2527795" cy="1081405"/>
-          </a:xfrm>
-        </p:spPr>
-        <p:txBody>
-          <a:bodyPr/>
-          <a:lstStyle/>
-          <a:p>
-            <a:r>
-              <a:rPr lang="en-US" dirty="0"/>
-              <a:t>Tags</a:t>
-            </a:r>
-            <a:endParaRPr lang="ru-RU" dirty="0"/>
-          </a:p>
-        </p:txBody>
-      </p:sp>
-      <p:sp>
-        <p:nvSpPr>
-          <p:cNvPr id="3" name="Text Placeholder 2">
-            <a:extLst>
-              <a:ext uri="{FF2B5EF4-FFF2-40B4-BE49-F238E27FC236}">
-                <a16:creationId xmlns:a16="http://schemas.microsoft.com/office/drawing/2014/main" id="{FFA63201-65F5-4A81-99F7-CCD52CE1219B}"/>
-              </a:ext>
-            </a:extLst>
-          </p:cNvPr>
-          <p:cNvSpPr>
-            <a:spLocks noGrp="1"/>
-          </p:cNvSpPr>
-          <p:nvPr>
-            <p:ph type="body" idx="1"/>
-          </p:nvPr>
-        </p:nvSpPr>
-        <p:spPr/>
-        <p:txBody>
-          <a:bodyPr/>
-          <a:lstStyle/>
-          <a:p>
-            <a:endParaRPr lang="ru-RU"/>
-          </a:p>
-        </p:txBody>
-      </p:sp>
-      <p:pic>
-        <p:nvPicPr>
-          <p:cNvPr id="5" name="Picture 4">
-            <a:extLst>
-              <a:ext uri="{FF2B5EF4-FFF2-40B4-BE49-F238E27FC236}">
-                <a16:creationId xmlns:a16="http://schemas.microsoft.com/office/drawing/2014/main" id="{07BFEEA7-E745-4F02-8CFA-B1022C39C011}"/>
-              </a:ext>
-            </a:extLst>
-          </p:cNvPr>
-          <p:cNvPicPr>
-            <a:picLocks noChangeAspect="1"/>
-          </p:cNvPicPr>
-          <p:nvPr/>
-        </p:nvPicPr>
-        <p:blipFill>
-          <a:blip r:embed="rId2"/>
-          <a:stretch>
-            <a:fillRect/>
-          </a:stretch>
-        </p:blipFill>
-        <p:spPr>
-          <a:xfrm>
-            <a:off x="5553645" y="2225675"/>
-            <a:ext cx="8996810" cy="8595763"/>
-          </a:xfrm>
-          <a:prstGeom prst="rect">
-            <a:avLst/>
-          </a:prstGeom>
-        </p:spPr>
-      </p:pic>
-    </p:spTree>
-    <p:extLst>
-      <p:ext uri="{BB962C8B-B14F-4D97-AF65-F5344CB8AC3E}">
-        <p14:creationId xmlns:p14="http://schemas.microsoft.com/office/powerpoint/2010/main" val="2026825691"/>
       </p:ext>
     </p:extLst>
   </p:cSld>
@@ -8684,10 +9842,10 @@
       </p:sp>
       <p:pic>
         <p:nvPicPr>
-          <p:cNvPr id="6" name="Picture 5">
+          <p:cNvPr id="5" name="Picture 4">
             <a:extLst>
               <a:ext uri="{FF2B5EF4-FFF2-40B4-BE49-F238E27FC236}">
-                <a16:creationId xmlns:a16="http://schemas.microsoft.com/office/drawing/2014/main" id="{E6C47968-BB08-40D4-A25B-E442E6226028}"/>
+                <a16:creationId xmlns:a16="http://schemas.microsoft.com/office/drawing/2014/main" id="{07BFEEA7-E745-4F02-8CFA-B1022C39C011}"/>
               </a:ext>
             </a:extLst>
           </p:cNvPr>
@@ -8704,8 +9862,8 @@
         </p:blipFill>
         <p:spPr>
           <a:xfrm>
-            <a:off x="4036689" y="2682875"/>
-            <a:ext cx="12030722" cy="7979309"/>
+            <a:off x="5553645" y="2225675"/>
+            <a:ext cx="8996810" cy="8595763"/>
           </a:xfrm>
           <a:prstGeom prst="rect">
             <a:avLst/>
@@ -8715,7 +9873,7 @@
     </p:spTree>
     <p:extLst>
       <p:ext uri="{BB962C8B-B14F-4D97-AF65-F5344CB8AC3E}">
-        <p14:creationId xmlns:p14="http://schemas.microsoft.com/office/powerpoint/2010/main" val="1718038216"/>
+        <p14:creationId xmlns:p14="http://schemas.microsoft.com/office/powerpoint/2010/main" val="2026825691"/>
       </p:ext>
     </p:extLst>
   </p:cSld>
@@ -8803,10 +9961,10 @@
       </p:sp>
       <p:pic>
         <p:nvPicPr>
-          <p:cNvPr id="5" name="Picture 4">
+          <p:cNvPr id="6" name="Picture 5">
             <a:extLst>
               <a:ext uri="{FF2B5EF4-FFF2-40B4-BE49-F238E27FC236}">
-                <a16:creationId xmlns:a16="http://schemas.microsoft.com/office/drawing/2014/main" id="{A25D3B41-1823-419D-B7EC-04968D195ED3}"/>
+                <a16:creationId xmlns:a16="http://schemas.microsoft.com/office/drawing/2014/main" id="{E6C47968-BB08-40D4-A25B-E442E6226028}"/>
               </a:ext>
             </a:extLst>
           </p:cNvPr>
@@ -8823,8 +9981,8 @@
         </p:blipFill>
         <p:spPr>
           <a:xfrm>
-            <a:off x="4470057" y="3052557"/>
-            <a:ext cx="11163986" cy="7366932"/>
+            <a:off x="4036689" y="2682875"/>
+            <a:ext cx="12030722" cy="7979309"/>
           </a:xfrm>
           <a:prstGeom prst="rect">
             <a:avLst/>
@@ -8834,7 +9992,7 @@
     </p:spTree>
     <p:extLst>
       <p:ext uri="{BB962C8B-B14F-4D97-AF65-F5344CB8AC3E}">
-        <p14:creationId xmlns:p14="http://schemas.microsoft.com/office/powerpoint/2010/main" val="2799440614"/>
+        <p14:creationId xmlns:p14="http://schemas.microsoft.com/office/powerpoint/2010/main" val="1718038216"/>
       </p:ext>
     </p:extLst>
   </p:cSld>
@@ -8922,6 +10080,125 @@
       </p:sp>
       <p:pic>
         <p:nvPicPr>
+          <p:cNvPr id="5" name="Picture 4">
+            <a:extLst>
+              <a:ext uri="{FF2B5EF4-FFF2-40B4-BE49-F238E27FC236}">
+                <a16:creationId xmlns:a16="http://schemas.microsoft.com/office/drawing/2014/main" id="{A25D3B41-1823-419D-B7EC-04968D195ED3}"/>
+              </a:ext>
+            </a:extLst>
+          </p:cNvPr>
+          <p:cNvPicPr>
+            <a:picLocks noChangeAspect="1"/>
+          </p:cNvPicPr>
+          <p:nvPr/>
+        </p:nvPicPr>
+        <p:blipFill>
+          <a:blip r:embed="rId2"/>
+          <a:stretch>
+            <a:fillRect/>
+          </a:stretch>
+        </p:blipFill>
+        <p:spPr>
+          <a:xfrm>
+            <a:off x="4470057" y="3052557"/>
+            <a:ext cx="11163986" cy="7366932"/>
+          </a:xfrm>
+          <a:prstGeom prst="rect">
+            <a:avLst/>
+          </a:prstGeom>
+        </p:spPr>
+      </p:pic>
+    </p:spTree>
+    <p:extLst>
+      <p:ext uri="{BB962C8B-B14F-4D97-AF65-F5344CB8AC3E}">
+        <p14:creationId xmlns:p14="http://schemas.microsoft.com/office/powerpoint/2010/main" val="2799440614"/>
+      </p:ext>
+    </p:extLst>
+  </p:cSld>
+  <p:clrMapOvr>
+    <a:masterClrMapping/>
+  </p:clrMapOvr>
+</p:sld>
+</file>
+
+<file path=ppt/slides/slide38.xml><?xml version="1.0" encoding="utf-8"?>
+<p:sld xmlns:a="http://schemas.openxmlformats.org/drawingml/2006/main" xmlns:r="http://schemas.openxmlformats.org/officeDocument/2006/relationships" xmlns:p="http://schemas.openxmlformats.org/presentationml/2006/main">
+  <p:cSld>
+    <p:spTree>
+      <p:nvGrpSpPr>
+        <p:cNvPr id="1" name=""/>
+        <p:cNvGrpSpPr/>
+        <p:nvPr/>
+      </p:nvGrpSpPr>
+      <p:grpSpPr>
+        <a:xfrm>
+          <a:off x="0" y="0"/>
+          <a:ext cx="0" cy="0"/>
+          <a:chOff x="0" y="0"/>
+          <a:chExt cx="0" cy="0"/>
+        </a:xfrm>
+      </p:grpSpPr>
+      <p:sp>
+        <p:nvSpPr>
+          <p:cNvPr id="2" name="Title 1">
+            <a:extLst>
+              <a:ext uri="{FF2B5EF4-FFF2-40B4-BE49-F238E27FC236}">
+                <a16:creationId xmlns:a16="http://schemas.microsoft.com/office/drawing/2014/main" id="{E223092B-A683-4585-8FD5-9541B3FD6927}"/>
+              </a:ext>
+            </a:extLst>
+          </p:cNvPr>
+          <p:cNvSpPr>
+            <a:spLocks noGrp="1"/>
+          </p:cNvSpPr>
+          <p:nvPr>
+            <p:ph type="title"/>
+          </p:nvPr>
+        </p:nvSpPr>
+        <p:spPr>
+          <a:xfrm>
+            <a:off x="8788151" y="854075"/>
+            <a:ext cx="2527795" cy="1081405"/>
+          </a:xfrm>
+        </p:spPr>
+        <p:txBody>
+          <a:bodyPr/>
+          <a:lstStyle/>
+          <a:p>
+            <a:r>
+              <a:rPr lang="en-US" dirty="0"/>
+              <a:t>Tags</a:t>
+            </a:r>
+            <a:endParaRPr lang="ru-RU" dirty="0"/>
+          </a:p>
+        </p:txBody>
+      </p:sp>
+      <p:sp>
+        <p:nvSpPr>
+          <p:cNvPr id="3" name="Text Placeholder 2">
+            <a:extLst>
+              <a:ext uri="{FF2B5EF4-FFF2-40B4-BE49-F238E27FC236}">
+                <a16:creationId xmlns:a16="http://schemas.microsoft.com/office/drawing/2014/main" id="{FFA63201-65F5-4A81-99F7-CCD52CE1219B}"/>
+              </a:ext>
+            </a:extLst>
+          </p:cNvPr>
+          <p:cNvSpPr>
+            <a:spLocks noGrp="1"/>
+          </p:cNvSpPr>
+          <p:nvPr>
+            <p:ph type="body" idx="1"/>
+          </p:nvPr>
+        </p:nvSpPr>
+        <p:spPr/>
+        <p:txBody>
+          <a:bodyPr/>
+          <a:lstStyle/>
+          <a:p>
+            <a:endParaRPr lang="ru-RU"/>
+          </a:p>
+        </p:txBody>
+      </p:sp>
+      <p:pic>
+        <p:nvPicPr>
           <p:cNvPr id="6" name="Picture 5">
             <a:extLst>
               <a:ext uri="{FF2B5EF4-FFF2-40B4-BE49-F238E27FC236}">
@@ -8963,7 +10240,7 @@
 </p:sld>
 </file>
 
-<file path=ppt/slides/slide38.xml><?xml version="1.0" encoding="utf-8"?>
+<file path=ppt/slides/slide39.xml><?xml version="1.0" encoding="utf-8"?>
 <p:sld xmlns:a="http://schemas.openxmlformats.org/drawingml/2006/main" xmlns:r="http://schemas.openxmlformats.org/officeDocument/2006/relationships" xmlns:p="http://schemas.openxmlformats.org/presentationml/2006/main">
   <p:cSld>
     <p:spTree>
@@ -9097,7 +10374,229 @@
 </p:sld>
 </file>
 
-<file path=ppt/slides/slide39.xml><?xml version="1.0" encoding="utf-8"?>
+<file path=ppt/slides/slide4.xml><?xml version="1.0" encoding="utf-8"?>
+<p:sld xmlns:a="http://schemas.openxmlformats.org/drawingml/2006/main" xmlns:r="http://schemas.openxmlformats.org/officeDocument/2006/relationships" xmlns:p="http://schemas.openxmlformats.org/presentationml/2006/main" showMasterSp="0">
+  <p:cSld>
+    <p:spTree>
+      <p:nvGrpSpPr>
+        <p:cNvPr id="1" name=""/>
+        <p:cNvGrpSpPr/>
+        <p:nvPr/>
+      </p:nvGrpSpPr>
+      <p:grpSpPr>
+        <a:xfrm>
+          <a:off x="0" y="0"/>
+          <a:ext cx="0" cy="0"/>
+          <a:chOff x="0" y="0"/>
+          <a:chExt cx="0" cy="0"/>
+        </a:xfrm>
+      </p:grpSpPr>
+      <p:sp>
+        <p:nvSpPr>
+          <p:cNvPr id="2" name="object 2"/>
+          <p:cNvSpPr txBox="1">
+            <a:spLocks noGrp="1"/>
+          </p:cNvSpPr>
+          <p:nvPr>
+            <p:ph type="title"/>
+          </p:nvPr>
+        </p:nvSpPr>
+        <p:spPr>
+          <a:xfrm>
+            <a:off x="5842606" y="821620"/>
+            <a:ext cx="8406130" cy="1081405"/>
+          </a:xfrm>
+          <a:prstGeom prst="rect">
+            <a:avLst/>
+          </a:prstGeom>
+        </p:spPr>
+        <p:txBody>
+          <a:bodyPr vert="horz" wrap="square" lIns="0" tIns="15875" rIns="0" bIns="0" rtlCol="0">
+            <a:spAutoFit/>
+          </a:bodyPr>
+          <a:lstStyle/>
+          <a:p>
+            <a:pPr marL="12700">
+              <a:lnSpc>
+                <a:spcPct val="100000"/>
+              </a:lnSpc>
+              <a:spcBef>
+                <a:spcPts val="125"/>
+              </a:spcBef>
+            </a:pPr>
+            <a:r>
+              <a:rPr spc="340" dirty="0"/>
+              <a:t>Ка</a:t>
+            </a:r>
+            <a:r>
+              <a:rPr spc="470" dirty="0"/>
+              <a:t>к</a:t>
+            </a:r>
+            <a:r>
+              <a:rPr spc="-800" dirty="0"/>
+              <a:t> </a:t>
+            </a:r>
+            <a:r>
+              <a:rPr spc="-215" dirty="0"/>
+              <a:t>посмотрет</a:t>
+            </a:r>
+            <a:r>
+              <a:rPr spc="-5" dirty="0"/>
+              <a:t>ь</a:t>
+            </a:r>
+            <a:r>
+              <a:rPr spc="-795" dirty="0"/>
+              <a:t> </a:t>
+            </a:r>
+            <a:r>
+              <a:rPr spc="70" dirty="0"/>
+              <a:t>код</a:t>
+            </a:r>
+          </a:p>
+        </p:txBody>
+      </p:sp>
+      <p:sp>
+        <p:nvSpPr>
+          <p:cNvPr id="3" name="object 3"/>
+          <p:cNvSpPr txBox="1"/>
+          <p:nvPr/>
+        </p:nvSpPr>
+        <p:spPr>
+          <a:xfrm>
+            <a:off x="1076272" y="3599336"/>
+            <a:ext cx="10277475" cy="628650"/>
+          </a:xfrm>
+          <a:prstGeom prst="rect">
+            <a:avLst/>
+          </a:prstGeom>
+        </p:spPr>
+        <p:txBody>
+          <a:bodyPr vert="horz" wrap="square" lIns="0" tIns="13335" rIns="0" bIns="0" rtlCol="0">
+            <a:spAutoFit/>
+          </a:bodyPr>
+          <a:lstStyle/>
+          <a:p>
+            <a:pPr marL="473075" indent="-461009">
+              <a:lnSpc>
+                <a:spcPct val="100000"/>
+              </a:lnSpc>
+              <a:spcBef>
+                <a:spcPts val="105"/>
+              </a:spcBef>
+              <a:buChar char="•"/>
+              <a:tabLst>
+                <a:tab pos="473075" algn="l"/>
+                <a:tab pos="473709" algn="l"/>
+              </a:tabLst>
+            </a:pPr>
+            <a:r>
+              <a:rPr sz="3950" spc="229" dirty="0" err="1">
+                <a:latin typeface="Microsoft Sans Serif"/>
+                <a:cs typeface="Microsoft Sans Serif"/>
+              </a:rPr>
+              <a:t>objdump</a:t>
+            </a:r>
+            <a:r>
+              <a:rPr sz="3950" spc="-10" dirty="0">
+                <a:latin typeface="Microsoft Sans Serif"/>
+                <a:cs typeface="Microsoft Sans Serif"/>
+              </a:rPr>
+              <a:t> </a:t>
+            </a:r>
+            <a:r>
+              <a:rPr sz="3950" spc="50" dirty="0">
+                <a:latin typeface="Microsoft Sans Serif"/>
+                <a:cs typeface="Microsoft Sans Serif"/>
+              </a:rPr>
+              <a:t>-M</a:t>
+            </a:r>
+            <a:r>
+              <a:rPr sz="3950" spc="-5" dirty="0">
+                <a:latin typeface="Microsoft Sans Serif"/>
+                <a:cs typeface="Microsoft Sans Serif"/>
+              </a:rPr>
+              <a:t> </a:t>
+            </a:r>
+            <a:r>
+              <a:rPr sz="3950" spc="145" dirty="0">
+                <a:latin typeface="Microsoft Sans Serif"/>
+                <a:cs typeface="Microsoft Sans Serif"/>
+              </a:rPr>
+              <a:t>intel</a:t>
+            </a:r>
+            <a:r>
+              <a:rPr sz="3950" spc="-5" dirty="0">
+                <a:latin typeface="Microsoft Sans Serif"/>
+                <a:cs typeface="Microsoft Sans Serif"/>
+              </a:rPr>
+              <a:t> </a:t>
+            </a:r>
+            <a:r>
+              <a:rPr sz="3950" spc="165" dirty="0">
+                <a:latin typeface="Microsoft Sans Serif"/>
+                <a:cs typeface="Microsoft Sans Serif"/>
+              </a:rPr>
+              <a:t>intel-mnemonic</a:t>
+            </a:r>
+            <a:r>
+              <a:rPr sz="3950" spc="-10" dirty="0">
+                <a:latin typeface="Microsoft Sans Serif"/>
+                <a:cs typeface="Microsoft Sans Serif"/>
+              </a:rPr>
+              <a:t> </a:t>
+            </a:r>
+            <a:r>
+              <a:rPr lang="en-US" sz="3950" spc="-10" dirty="0">
+                <a:latin typeface="Microsoft Sans Serif"/>
+                <a:cs typeface="Microsoft Sans Serif"/>
+              </a:rPr>
+              <a:t>–d </a:t>
+            </a:r>
+            <a:r>
+              <a:rPr sz="3950" spc="100" dirty="0" err="1">
+                <a:latin typeface="Microsoft Sans Serif"/>
+                <a:cs typeface="Microsoft Sans Serif"/>
+              </a:rPr>
+              <a:t>a.out</a:t>
+            </a:r>
+            <a:endParaRPr sz="3950" dirty="0">
+              <a:latin typeface="Microsoft Sans Serif"/>
+              <a:cs typeface="Microsoft Sans Serif"/>
+            </a:endParaRPr>
+          </a:p>
+        </p:txBody>
+      </p:sp>
+      <p:pic>
+        <p:nvPicPr>
+          <p:cNvPr id="4" name="object 4"/>
+          <p:cNvPicPr/>
+          <p:nvPr/>
+        </p:nvPicPr>
+        <p:blipFill>
+          <a:blip r:embed="rId2" cstate="print"/>
+          <a:stretch>
+            <a:fillRect/>
+          </a:stretch>
+        </p:blipFill>
+        <p:spPr>
+          <a:xfrm>
+            <a:off x="2269231" y="4875491"/>
+            <a:ext cx="16749018" cy="4935449"/>
+          </a:xfrm>
+          <a:prstGeom prst="rect">
+            <a:avLst/>
+          </a:prstGeom>
+        </p:spPr>
+      </p:pic>
+    </p:spTree>
+  </p:cSld>
+  <p:clrMapOvr>
+    <a:masterClrMapping/>
+  </p:clrMapOvr>
+</p:sld>
+</file>
+
+<file path=ppt/slides/slide40.xml><?xml version="1.0" encoding="utf-8"?>
 <p:sld xmlns:a="http://schemas.openxmlformats.org/drawingml/2006/main" xmlns:r="http://schemas.openxmlformats.org/officeDocument/2006/relationships" xmlns:p="http://schemas.openxmlformats.org/presentationml/2006/main">
   <p:cSld>
     <p:spTree>
@@ -9208,229 +10707,7 @@
 </p:sld>
 </file>
 
-<file path=ppt/slides/slide4.xml><?xml version="1.0" encoding="utf-8"?>
-<p:sld xmlns:a="http://schemas.openxmlformats.org/drawingml/2006/main" xmlns:r="http://schemas.openxmlformats.org/officeDocument/2006/relationships" xmlns:p="http://schemas.openxmlformats.org/presentationml/2006/main" showMasterSp="0">
-  <p:cSld>
-    <p:spTree>
-      <p:nvGrpSpPr>
-        <p:cNvPr id="1" name=""/>
-        <p:cNvGrpSpPr/>
-        <p:nvPr/>
-      </p:nvGrpSpPr>
-      <p:grpSpPr>
-        <a:xfrm>
-          <a:off x="0" y="0"/>
-          <a:ext cx="0" cy="0"/>
-          <a:chOff x="0" y="0"/>
-          <a:chExt cx="0" cy="0"/>
-        </a:xfrm>
-      </p:grpSpPr>
-      <p:sp>
-        <p:nvSpPr>
-          <p:cNvPr id="2" name="object 2"/>
-          <p:cNvSpPr txBox="1">
-            <a:spLocks noGrp="1"/>
-          </p:cNvSpPr>
-          <p:nvPr>
-            <p:ph type="title"/>
-          </p:nvPr>
-        </p:nvSpPr>
-        <p:spPr>
-          <a:xfrm>
-            <a:off x="5842606" y="821620"/>
-            <a:ext cx="8406130" cy="1081405"/>
-          </a:xfrm>
-          <a:prstGeom prst="rect">
-            <a:avLst/>
-          </a:prstGeom>
-        </p:spPr>
-        <p:txBody>
-          <a:bodyPr vert="horz" wrap="square" lIns="0" tIns="15875" rIns="0" bIns="0" rtlCol="0">
-            <a:spAutoFit/>
-          </a:bodyPr>
-          <a:lstStyle/>
-          <a:p>
-            <a:pPr marL="12700">
-              <a:lnSpc>
-                <a:spcPct val="100000"/>
-              </a:lnSpc>
-              <a:spcBef>
-                <a:spcPts val="125"/>
-              </a:spcBef>
-            </a:pPr>
-            <a:r>
-              <a:rPr spc="340" dirty="0"/>
-              <a:t>Ка</a:t>
-            </a:r>
-            <a:r>
-              <a:rPr spc="470" dirty="0"/>
-              <a:t>к</a:t>
-            </a:r>
-            <a:r>
-              <a:rPr spc="-800" dirty="0"/>
-              <a:t> </a:t>
-            </a:r>
-            <a:r>
-              <a:rPr spc="-215" dirty="0"/>
-              <a:t>посмотрет</a:t>
-            </a:r>
-            <a:r>
-              <a:rPr spc="-5" dirty="0"/>
-              <a:t>ь</a:t>
-            </a:r>
-            <a:r>
-              <a:rPr spc="-795" dirty="0"/>
-              <a:t> </a:t>
-            </a:r>
-            <a:r>
-              <a:rPr spc="70" dirty="0"/>
-              <a:t>код</a:t>
-            </a:r>
-          </a:p>
-        </p:txBody>
-      </p:sp>
-      <p:sp>
-        <p:nvSpPr>
-          <p:cNvPr id="3" name="object 3"/>
-          <p:cNvSpPr txBox="1"/>
-          <p:nvPr/>
-        </p:nvSpPr>
-        <p:spPr>
-          <a:xfrm>
-            <a:off x="1076272" y="3599336"/>
-            <a:ext cx="10277475" cy="628650"/>
-          </a:xfrm>
-          <a:prstGeom prst="rect">
-            <a:avLst/>
-          </a:prstGeom>
-        </p:spPr>
-        <p:txBody>
-          <a:bodyPr vert="horz" wrap="square" lIns="0" tIns="13335" rIns="0" bIns="0" rtlCol="0">
-            <a:spAutoFit/>
-          </a:bodyPr>
-          <a:lstStyle/>
-          <a:p>
-            <a:pPr marL="473075" indent="-461009">
-              <a:lnSpc>
-                <a:spcPct val="100000"/>
-              </a:lnSpc>
-              <a:spcBef>
-                <a:spcPts val="105"/>
-              </a:spcBef>
-              <a:buChar char="•"/>
-              <a:tabLst>
-                <a:tab pos="473075" algn="l"/>
-                <a:tab pos="473709" algn="l"/>
-              </a:tabLst>
-            </a:pPr>
-            <a:r>
-              <a:rPr sz="3950" spc="229" dirty="0" err="1">
-                <a:latin typeface="Microsoft Sans Serif"/>
-                <a:cs typeface="Microsoft Sans Serif"/>
-              </a:rPr>
-              <a:t>objdump</a:t>
-            </a:r>
-            <a:r>
-              <a:rPr sz="3950" spc="-10" dirty="0">
-                <a:latin typeface="Microsoft Sans Serif"/>
-                <a:cs typeface="Microsoft Sans Serif"/>
-              </a:rPr>
-              <a:t> </a:t>
-            </a:r>
-            <a:r>
-              <a:rPr sz="3950" spc="50" dirty="0">
-                <a:latin typeface="Microsoft Sans Serif"/>
-                <a:cs typeface="Microsoft Sans Serif"/>
-              </a:rPr>
-              <a:t>-M</a:t>
-            </a:r>
-            <a:r>
-              <a:rPr sz="3950" spc="-5" dirty="0">
-                <a:latin typeface="Microsoft Sans Serif"/>
-                <a:cs typeface="Microsoft Sans Serif"/>
-              </a:rPr>
-              <a:t> </a:t>
-            </a:r>
-            <a:r>
-              <a:rPr sz="3950" spc="145" dirty="0">
-                <a:latin typeface="Microsoft Sans Serif"/>
-                <a:cs typeface="Microsoft Sans Serif"/>
-              </a:rPr>
-              <a:t>intel</a:t>
-            </a:r>
-            <a:r>
-              <a:rPr sz="3950" spc="-5" dirty="0">
-                <a:latin typeface="Microsoft Sans Serif"/>
-                <a:cs typeface="Microsoft Sans Serif"/>
-              </a:rPr>
-              <a:t> </a:t>
-            </a:r>
-            <a:r>
-              <a:rPr sz="3950" spc="165" dirty="0">
-                <a:latin typeface="Microsoft Sans Serif"/>
-                <a:cs typeface="Microsoft Sans Serif"/>
-              </a:rPr>
-              <a:t>intel-mnemonic</a:t>
-            </a:r>
-            <a:r>
-              <a:rPr sz="3950" spc="-10" dirty="0">
-                <a:latin typeface="Microsoft Sans Serif"/>
-                <a:cs typeface="Microsoft Sans Serif"/>
-              </a:rPr>
-              <a:t> </a:t>
-            </a:r>
-            <a:r>
-              <a:rPr lang="en-US" sz="3950" spc="-10" dirty="0">
-                <a:latin typeface="Microsoft Sans Serif"/>
-                <a:cs typeface="Microsoft Sans Serif"/>
-              </a:rPr>
-              <a:t>–d </a:t>
-            </a:r>
-            <a:r>
-              <a:rPr sz="3950" spc="100" dirty="0" err="1">
-                <a:latin typeface="Microsoft Sans Serif"/>
-                <a:cs typeface="Microsoft Sans Serif"/>
-              </a:rPr>
-              <a:t>a.out</a:t>
-            </a:r>
-            <a:endParaRPr sz="3950" dirty="0">
-              <a:latin typeface="Microsoft Sans Serif"/>
-              <a:cs typeface="Microsoft Sans Serif"/>
-            </a:endParaRPr>
-          </a:p>
-        </p:txBody>
-      </p:sp>
-      <p:pic>
-        <p:nvPicPr>
-          <p:cNvPr id="4" name="object 4"/>
-          <p:cNvPicPr/>
-          <p:nvPr/>
-        </p:nvPicPr>
-        <p:blipFill>
-          <a:blip r:embed="rId2" cstate="print"/>
-          <a:stretch>
-            <a:fillRect/>
-          </a:stretch>
-        </p:blipFill>
-        <p:spPr>
-          <a:xfrm>
-            <a:off x="2269231" y="4875491"/>
-            <a:ext cx="16749018" cy="4935449"/>
-          </a:xfrm>
-          <a:prstGeom prst="rect">
-            <a:avLst/>
-          </a:prstGeom>
-        </p:spPr>
-      </p:pic>
-    </p:spTree>
-  </p:cSld>
-  <p:clrMapOvr>
-    <a:masterClrMapping/>
-  </p:clrMapOvr>
-</p:sld>
-</file>
-
-<file path=ppt/slides/slide40.xml><?xml version="1.0" encoding="utf-8"?>
+<file path=ppt/slides/slide41.xml><?xml version="1.0" encoding="utf-8"?>
 <p:sld xmlns:a="http://schemas.openxmlformats.org/drawingml/2006/main" xmlns:r="http://schemas.openxmlformats.org/officeDocument/2006/relationships" xmlns:p="http://schemas.openxmlformats.org/presentationml/2006/main">
   <p:cSld>
     <p:spTree>
@@ -9541,7 +10818,7 @@
 </p:sld>
 </file>
 
-<file path=ppt/slides/slide41.xml><?xml version="1.0" encoding="utf-8"?>
+<file path=ppt/slides/slide42.xml><?xml version="1.0" encoding="utf-8"?>
 <p:sld xmlns:a="http://schemas.openxmlformats.org/drawingml/2006/main" xmlns:r="http://schemas.openxmlformats.org/officeDocument/2006/relationships" xmlns:p="http://schemas.openxmlformats.org/presentationml/2006/main">
   <p:cSld>
     <p:spTree>
@@ -9651,7 +10928,7 @@
 </p:sld>
 </file>
 
-<file path=ppt/slides/slide42.xml><?xml version="1.0" encoding="utf-8"?>
+<file path=ppt/slides/slide43.xml><?xml version="1.0" encoding="utf-8"?>
 <p:sld xmlns:a="http://schemas.openxmlformats.org/drawingml/2006/main" xmlns:r="http://schemas.openxmlformats.org/officeDocument/2006/relationships" xmlns:p="http://schemas.openxmlformats.org/presentationml/2006/main">
   <p:cSld>
     <p:spTree>
@@ -9769,7 +11046,7 @@
 </p:sld>
 </file>
 
-<file path=ppt/slides/slide43.xml><?xml version="1.0" encoding="utf-8"?>
+<file path=ppt/slides/slide44.xml><?xml version="1.0" encoding="utf-8"?>
 <p:sld xmlns:a="http://schemas.openxmlformats.org/drawingml/2006/main" xmlns:r="http://schemas.openxmlformats.org/officeDocument/2006/relationships" xmlns:p="http://schemas.openxmlformats.org/presentationml/2006/main">
   <p:cSld>
     <p:spTree>
@@ -9917,7 +11194,7 @@
 </p:sld>
 </file>
 
-<file path=ppt/slides/slide44.xml><?xml version="1.0" encoding="utf-8"?>
+<file path=ppt/slides/slide45.xml><?xml version="1.0" encoding="utf-8"?>
 <p:sld xmlns:a="http://schemas.openxmlformats.org/drawingml/2006/main" xmlns:r="http://schemas.openxmlformats.org/officeDocument/2006/relationships" xmlns:p="http://schemas.openxmlformats.org/presentationml/2006/main">
   <p:cSld>
     <p:spTree>
@@ -10036,7 +11313,7 @@
 </p:sld>
 </file>
 
-<file path=ppt/slides/slide45.xml><?xml version="1.0" encoding="utf-8"?>
+<file path=ppt/slides/slide46.xml><?xml version="1.0" encoding="utf-8"?>
 <p:sld xmlns:a="http://schemas.openxmlformats.org/drawingml/2006/main" xmlns:r="http://schemas.openxmlformats.org/officeDocument/2006/relationships" xmlns:p="http://schemas.openxmlformats.org/presentationml/2006/main">
   <p:cSld>
     <p:spTree>
@@ -10154,7 +11431,7 @@
 </p:sld>
 </file>
 
-<file path=ppt/slides/slide46.xml><?xml version="1.0" encoding="utf-8"?>
+<file path=ppt/slides/slide47.xml><?xml version="1.0" encoding="utf-8"?>
 <p:sld xmlns:a="http://schemas.openxmlformats.org/drawingml/2006/main" xmlns:r="http://schemas.openxmlformats.org/officeDocument/2006/relationships" xmlns:p="http://schemas.openxmlformats.org/presentationml/2006/main">
   <p:cSld>
     <p:spTree>
@@ -10272,7 +11549,7 @@
 </p:sld>
 </file>
 
-<file path=ppt/slides/slide47.xml><?xml version="1.0" encoding="utf-8"?>
+<file path=ppt/slides/slide48.xml><?xml version="1.0" encoding="utf-8"?>
 <p:sld xmlns:a="http://schemas.openxmlformats.org/drawingml/2006/main" xmlns:r="http://schemas.openxmlformats.org/officeDocument/2006/relationships" xmlns:p="http://schemas.openxmlformats.org/presentationml/2006/main">
   <p:cSld>
     <p:spTree>
@@ -10390,7 +11667,7 @@
 </p:sld>
 </file>
 
-<file path=ppt/slides/slide48.xml><?xml version="1.0" encoding="utf-8"?>
+<file path=ppt/slides/slide49.xml><?xml version="1.0" encoding="utf-8"?>
 <p:sld xmlns:a="http://schemas.openxmlformats.org/drawingml/2006/main" xmlns:r="http://schemas.openxmlformats.org/officeDocument/2006/relationships" xmlns:p="http://schemas.openxmlformats.org/presentationml/2006/main">
   <p:cSld>
     <p:spTree>
@@ -10499,105 +11776,6 @@
     <p:extLst>
       <p:ext uri="{BB962C8B-B14F-4D97-AF65-F5344CB8AC3E}">
         <p14:creationId xmlns:p14="http://schemas.microsoft.com/office/powerpoint/2010/main" val="2273209821"/>
-      </p:ext>
-    </p:extLst>
-  </p:cSld>
-  <p:clrMapOvr>
-    <a:masterClrMapping/>
-  </p:clrMapOvr>
-</p:sld>
-</file>
-
-<file path=ppt/slides/slide49.xml><?xml version="1.0" encoding="utf-8"?>
-<p:sld xmlns:a="http://schemas.openxmlformats.org/drawingml/2006/main" xmlns:r="http://schemas.openxmlformats.org/officeDocument/2006/relationships" xmlns:p="http://schemas.openxmlformats.org/presentationml/2006/main">
-  <p:cSld>
-    <p:spTree>
-      <p:nvGrpSpPr>
-        <p:cNvPr id="1" name=""/>
-        <p:cNvGrpSpPr/>
-        <p:nvPr/>
-      </p:nvGrpSpPr>
-      <p:grpSpPr>
-        <a:xfrm>
-          <a:off x="0" y="0"/>
-          <a:ext cx="0" cy="0"/>
-          <a:chOff x="0" y="0"/>
-          <a:chExt cx="0" cy="0"/>
-        </a:xfrm>
-      </p:grpSpPr>
-      <p:sp>
-        <p:nvSpPr>
-          <p:cNvPr id="2" name="Title 1">
-            <a:extLst>
-              <a:ext uri="{FF2B5EF4-FFF2-40B4-BE49-F238E27FC236}">
-                <a16:creationId xmlns:a16="http://schemas.microsoft.com/office/drawing/2014/main" id="{21DAEB84-9E5E-44F1-9346-FBBBA164C31A}"/>
-              </a:ext>
-            </a:extLst>
-          </p:cNvPr>
-          <p:cNvSpPr>
-            <a:spLocks noGrp="1"/>
-          </p:cNvSpPr>
-          <p:nvPr>
-            <p:ph type="title"/>
-          </p:nvPr>
-        </p:nvSpPr>
-        <p:spPr/>
-        <p:txBody>
-          <a:bodyPr/>
-          <a:lstStyle/>
-          <a:p>
-            <a:r>
-              <a:rPr lang="ru-RU" dirty="0"/>
-              <a:t>Что почитать</a:t>
-            </a:r>
-          </a:p>
-        </p:txBody>
-      </p:sp>
-      <p:sp>
-        <p:nvSpPr>
-          <p:cNvPr id="3" name="Text Placeholder 2">
-            <a:extLst>
-              <a:ext uri="{FF2B5EF4-FFF2-40B4-BE49-F238E27FC236}">
-                <a16:creationId xmlns:a16="http://schemas.microsoft.com/office/drawing/2014/main" id="{1BDCF72B-67F5-41C2-A7D0-D3F2EB694962}"/>
-              </a:ext>
-            </a:extLst>
-          </p:cNvPr>
-          <p:cNvSpPr>
-            <a:spLocks noGrp="1"/>
-          </p:cNvSpPr>
-          <p:nvPr>
-            <p:ph type="body" idx="1"/>
-          </p:nvPr>
-        </p:nvSpPr>
-        <p:spPr>
-          <a:xfrm>
-            <a:off x="1076272" y="3281021"/>
-            <a:ext cx="17951555" cy="553998"/>
-          </a:xfrm>
-        </p:spPr>
-        <p:txBody>
-          <a:bodyPr/>
-          <a:lstStyle/>
-          <a:p>
-            <a:r>
-              <a:rPr lang="en-US" sz="3600" dirty="0">
-                <a:latin typeface="Arial" panose="020B0604020202020204" pitchFamily="34" charset="0"/>
-                <a:cs typeface="Arial" panose="020B0604020202020204" pitchFamily="34" charset="0"/>
-                <a:hlinkClick r:id="rId2"/>
-              </a:rPr>
-              <a:t>Intel Skylake</a:t>
-            </a:r>
-            <a:endParaRPr lang="ru-RU" sz="3600" dirty="0">
-              <a:latin typeface="Arial" panose="020B0604020202020204" pitchFamily="34" charset="0"/>
-              <a:cs typeface="Arial" panose="020B0604020202020204" pitchFamily="34" charset="0"/>
-            </a:endParaRPr>
-          </a:p>
-        </p:txBody>
-      </p:sp>
-    </p:spTree>
-    <p:extLst>
-      <p:ext uri="{BB962C8B-B14F-4D97-AF65-F5344CB8AC3E}">
-        <p14:creationId xmlns:p14="http://schemas.microsoft.com/office/powerpoint/2010/main" val="2782695038"/>
       </p:ext>
     </p:extLst>
   </p:cSld>
@@ -11179,6 +12357,105 @@
         </p:txBody>
       </p:sp>
     </p:spTree>
+  </p:cSld>
+  <p:clrMapOvr>
+    <a:masterClrMapping/>
+  </p:clrMapOvr>
+</p:sld>
+</file>
+
+<file path=ppt/slides/slide50.xml><?xml version="1.0" encoding="utf-8"?>
+<p:sld xmlns:a="http://schemas.openxmlformats.org/drawingml/2006/main" xmlns:r="http://schemas.openxmlformats.org/officeDocument/2006/relationships" xmlns:p="http://schemas.openxmlformats.org/presentationml/2006/main">
+  <p:cSld>
+    <p:spTree>
+      <p:nvGrpSpPr>
+        <p:cNvPr id="1" name=""/>
+        <p:cNvGrpSpPr/>
+        <p:nvPr/>
+      </p:nvGrpSpPr>
+      <p:grpSpPr>
+        <a:xfrm>
+          <a:off x="0" y="0"/>
+          <a:ext cx="0" cy="0"/>
+          <a:chOff x="0" y="0"/>
+          <a:chExt cx="0" cy="0"/>
+        </a:xfrm>
+      </p:grpSpPr>
+      <p:sp>
+        <p:nvSpPr>
+          <p:cNvPr id="2" name="Title 1">
+            <a:extLst>
+              <a:ext uri="{FF2B5EF4-FFF2-40B4-BE49-F238E27FC236}">
+                <a16:creationId xmlns:a16="http://schemas.microsoft.com/office/drawing/2014/main" id="{21DAEB84-9E5E-44F1-9346-FBBBA164C31A}"/>
+              </a:ext>
+            </a:extLst>
+          </p:cNvPr>
+          <p:cNvSpPr>
+            <a:spLocks noGrp="1"/>
+          </p:cNvSpPr>
+          <p:nvPr>
+            <p:ph type="title"/>
+          </p:nvPr>
+        </p:nvSpPr>
+        <p:spPr/>
+        <p:txBody>
+          <a:bodyPr/>
+          <a:lstStyle/>
+          <a:p>
+            <a:r>
+              <a:rPr lang="ru-RU" dirty="0"/>
+              <a:t>Что почитать</a:t>
+            </a:r>
+          </a:p>
+        </p:txBody>
+      </p:sp>
+      <p:sp>
+        <p:nvSpPr>
+          <p:cNvPr id="3" name="Text Placeholder 2">
+            <a:extLst>
+              <a:ext uri="{FF2B5EF4-FFF2-40B4-BE49-F238E27FC236}">
+                <a16:creationId xmlns:a16="http://schemas.microsoft.com/office/drawing/2014/main" id="{1BDCF72B-67F5-41C2-A7D0-D3F2EB694962}"/>
+              </a:ext>
+            </a:extLst>
+          </p:cNvPr>
+          <p:cNvSpPr>
+            <a:spLocks noGrp="1"/>
+          </p:cNvSpPr>
+          <p:nvPr>
+            <p:ph type="body" idx="1"/>
+          </p:nvPr>
+        </p:nvSpPr>
+        <p:spPr>
+          <a:xfrm>
+            <a:off x="1076272" y="3281021"/>
+            <a:ext cx="17951555" cy="553998"/>
+          </a:xfrm>
+        </p:spPr>
+        <p:txBody>
+          <a:bodyPr/>
+          <a:lstStyle/>
+          <a:p>
+            <a:r>
+              <a:rPr lang="en-US" sz="3600" dirty="0">
+                <a:latin typeface="Arial" panose="020B0604020202020204" pitchFamily="34" charset="0"/>
+                <a:cs typeface="Arial" panose="020B0604020202020204" pitchFamily="34" charset="0"/>
+                <a:hlinkClick r:id="rId2"/>
+              </a:rPr>
+              <a:t>Intel Skylake</a:t>
+            </a:r>
+            <a:endParaRPr lang="ru-RU" sz="3600" dirty="0">
+              <a:latin typeface="Arial" panose="020B0604020202020204" pitchFamily="34" charset="0"/>
+              <a:cs typeface="Arial" panose="020B0604020202020204" pitchFamily="34" charset="0"/>
+            </a:endParaRPr>
+          </a:p>
+        </p:txBody>
+      </p:sp>
+    </p:spTree>
+    <p:extLst>
+      <p:ext uri="{BB962C8B-B14F-4D97-AF65-F5344CB8AC3E}">
+        <p14:creationId xmlns:p14="http://schemas.microsoft.com/office/powerpoint/2010/main" val="2782695038"/>
+      </p:ext>
+    </p:extLst>
   </p:cSld>
   <p:clrMapOvr>
     <a:masterClrMapping/>
